--- a/docs/tech-posts/post/tableau-cloud-vs-desktop-feature-diff-summary.pptx
+++ b/docs/tech-posts/post/tableau-cloud-vs-desktop-feature-diff-summary.pptx
@@ -2,19 +2,19 @@
 <file path=ppt/presentation.xml><?xml version="1.0" encoding="utf-8"?>
 <p:presentation xmlns:p="http://schemas.openxmlformats.org/presentationml/2006/main">
   <p:sldMasterIdLst>
-    <p:sldMasterId xmlns:r="http://schemas.openxmlformats.org/officeDocument/2006/relationships" id="2147483648" r:id="R16ae7d798fa143e6"/>
+    <p:sldMasterId xmlns:r="http://schemas.openxmlformats.org/officeDocument/2006/relationships" id="2147483648" r:id="Rbfce956cdbdd49c5"/>
   </p:sldMasterIdLst>
   <p:notesMasterIdLst>
-    <p:notesMasterId xmlns:r="http://schemas.openxmlformats.org/officeDocument/2006/relationships" r:id="R0fbe7384d2c841f7"/>
+    <p:notesMasterId xmlns:r="http://schemas.openxmlformats.org/officeDocument/2006/relationships" r:id="R85262c5fcd134d79"/>
   </p:notesMasterIdLst>
   <p:sldIdLst>
-    <p:sldId xmlns:r="http://schemas.openxmlformats.org/officeDocument/2006/relationships" id="256" r:id="Ref2fd1f981b34298"/>
-    <p:sldId xmlns:r="http://schemas.openxmlformats.org/officeDocument/2006/relationships" id="257" r:id="Rab9833bb18654932"/>
-    <p:sldId xmlns:r="http://schemas.openxmlformats.org/officeDocument/2006/relationships" id="258" r:id="R7978e36c2a3e4fb7"/>
-    <p:sldId xmlns:r="http://schemas.openxmlformats.org/officeDocument/2006/relationships" id="259" r:id="R25f472d6bd8d46b6"/>
-    <p:sldId xmlns:r="http://schemas.openxmlformats.org/officeDocument/2006/relationships" id="260" r:id="Rbba0fe7327bd481c"/>
-    <p:sldId xmlns:r="http://schemas.openxmlformats.org/officeDocument/2006/relationships" id="261" r:id="R135b7e8dbf424b1f"/>
-    <p:sldId xmlns:r="http://schemas.openxmlformats.org/officeDocument/2006/relationships" id="262" r:id="Ra44e6f8e85994b75"/>
+    <p:sldId xmlns:r="http://schemas.openxmlformats.org/officeDocument/2006/relationships" id="256" r:id="Re3ce745f2495423c"/>
+    <p:sldId xmlns:r="http://schemas.openxmlformats.org/officeDocument/2006/relationships" id="257" r:id="R3889a91de0644170"/>
+    <p:sldId xmlns:r="http://schemas.openxmlformats.org/officeDocument/2006/relationships" id="258" r:id="Re310f27d7af64a95"/>
+    <p:sldId xmlns:r="http://schemas.openxmlformats.org/officeDocument/2006/relationships" id="259" r:id="R026ce57906384116"/>
+    <p:sldId xmlns:r="http://schemas.openxmlformats.org/officeDocument/2006/relationships" id="260" r:id="R966754f5d5bb4259"/>
+    <p:sldId xmlns:r="http://schemas.openxmlformats.org/officeDocument/2006/relationships" id="261" r:id="R368aa777b0db4a62"/>
+    <p:sldId xmlns:r="http://schemas.openxmlformats.org/officeDocument/2006/relationships" id="262" r:id="R504b8f03ceb745a5"/>
   </p:sldIdLst>
   <p:sldSz cx="12192000" cy="6858000"/>
   <p:notesSz cx="6858000" cy="9144000"/>
@@ -882,7 +882,7 @@
           <p:cNvPr id="1" name="Title 1">
             <a:extLst xmlns:a="http://schemas.openxmlformats.org/drawingml/2006/main">
               <a:ext uri="{FF2B5EF4-FFF2-40B4-BE49-F238E27FC236}">
-                <a16:creationId xmlns:a16="http://schemas.microsoft.com/office/drawing/2014/main" id="{9C52911E-72B5-4223-B1AA-BFC3E1445995}"/>
+                <a16:creationId xmlns:a16="http://schemas.microsoft.com/office/drawing/2014/main" id="{01FE6918-BEA4-4818-B0CB-DC101CE651A9}"/>
               </a:ext>
             </a:extLst>
           </p:cNvPr>
@@ -913,7 +913,7 @@
           <p:cNvPr id="2" name="Subtitle 2">
             <a:extLst xmlns:a="http://schemas.openxmlformats.org/drawingml/2006/main">
               <a:ext uri="{FF2B5EF4-FFF2-40B4-BE49-F238E27FC236}">
-                <a16:creationId xmlns:a16="http://schemas.microsoft.com/office/drawing/2014/main" id="{1528D896-604D-46AA-9216-319B2B4ABBE5}"/>
+                <a16:creationId xmlns:a16="http://schemas.microsoft.com/office/drawing/2014/main" id="{E7624B7F-21EE-4B24-9EF1-7C254674FDC0}"/>
               </a:ext>
             </a:extLst>
           </p:cNvPr>
@@ -976,7 +976,7 @@
           <p:cNvPr id="3" name="Date Placeholder 3">
             <a:extLst xmlns:a="http://schemas.openxmlformats.org/drawingml/2006/main">
               <a:ext uri="{FF2B5EF4-FFF2-40B4-BE49-F238E27FC236}">
-                <a16:creationId xmlns:a16="http://schemas.microsoft.com/office/drawing/2014/main" id="{069125BF-73A4-464F-8697-25BCEE6477E6}"/>
+                <a16:creationId xmlns:a16="http://schemas.microsoft.com/office/drawing/2014/main" id="{9A8373BE-4C8E-4939-BBF3-C3734EF3B1A6}"/>
               </a:ext>
             </a:extLst>
           </p:cNvPr>
@@ -997,7 +997,7 @@
           <p:cNvPr id="4" name="Footer Placeholder 4">
             <a:extLst xmlns:a="http://schemas.openxmlformats.org/drawingml/2006/main">
               <a:ext uri="{FF2B5EF4-FFF2-40B4-BE49-F238E27FC236}">
-                <a16:creationId xmlns:a16="http://schemas.microsoft.com/office/drawing/2014/main" id="{BFB89941-13F3-4DC7-93E3-A74FA625B1A2}"/>
+                <a16:creationId xmlns:a16="http://schemas.microsoft.com/office/drawing/2014/main" id="{D87212A5-6995-48F6-8AC2-36664A1198DB}"/>
               </a:ext>
             </a:extLst>
           </p:cNvPr>
@@ -1018,7 +1018,7 @@
           <p:cNvPr id="5" name="Slide Number Placeholder 5">
             <a:extLst xmlns:a="http://schemas.openxmlformats.org/drawingml/2006/main">
               <a:ext uri="{FF2B5EF4-FFF2-40B4-BE49-F238E27FC236}">
-                <a16:creationId xmlns:a16="http://schemas.microsoft.com/office/drawing/2014/main" id="{07657F96-14BB-4F34-A3C2-E58CAF19D6CA}"/>
+                <a16:creationId xmlns:a16="http://schemas.microsoft.com/office/drawing/2014/main" id="{439AD580-5634-40B8-ADF2-F75BA71FC2A9}"/>
               </a:ext>
             </a:extLst>
           </p:cNvPr>
@@ -1061,7 +1061,7 @@
           <p:cNvPr id="1" name="Slide Number Placeholder 5">
             <a:extLst xmlns:a="http://schemas.openxmlformats.org/drawingml/2006/main">
               <a:ext uri="{FF2B5EF4-FFF2-40B4-BE49-F238E27FC236}">
-                <a16:creationId xmlns:a16="http://schemas.microsoft.com/office/drawing/2014/main" id="{E70205EE-5C2B-4F2B-A030-212D1CD50ECD}"/>
+                <a16:creationId xmlns:a16="http://schemas.microsoft.com/office/drawing/2014/main" id="{7E561AF2-6FD5-4ECB-A320-0545F3E1DE82}"/>
               </a:ext>
             </a:extLst>
           </p:cNvPr>
@@ -1100,7 +1100,7 @@
   </p:cSld>
   <p:clrMap bg1="lt1" tx1="dk1" bg2="lt2" tx2="dk2" accent1="accent1" accent2="accent2" accent3="accent3" accent4="accent4" accent5="accent5" accent6="accent6" hlink="hlink" folHlink="folHlink"/>
   <p:sldLayoutIdLst>
-    <p:sldLayoutId xmlns:r="http://schemas.openxmlformats.org/officeDocument/2006/relationships" id="2147483649" r:id="R7e2cee7b2dcf4b5f"/>
+    <p:sldLayoutId xmlns:r="http://schemas.openxmlformats.org/officeDocument/2006/relationships" id="2147483649" r:id="Rcbe53dcf687946ae"/>
   </p:sldLayoutIdLst>
   <p:txStyles>
     <p:titleStyle>
@@ -1406,7 +1406,7 @@
           <p:cNvPr id="1" name="Slide Number Placeholder 5">
             <a:extLst xmlns:a="http://schemas.openxmlformats.org/drawingml/2006/main">
               <a:ext uri="{FF2B5EF4-FFF2-40B4-BE49-F238E27FC236}">
-                <a16:creationId xmlns:a16="http://schemas.microsoft.com/office/drawing/2014/main" id="{07657F96-14BB-4F34-A3C2-E58CAF19D6CA}"/>
+                <a16:creationId xmlns:a16="http://schemas.microsoft.com/office/drawing/2014/main" id="{439AD580-5634-40B8-ADF2-F75BA71FC2A9}"/>
               </a:ext>
             </a:extLst>
           </p:cNvPr>
@@ -1438,7 +1438,7 @@
           <p:cNvPr id="2" name="">
             <a:extLst xmlns:a="http://schemas.openxmlformats.org/drawingml/2006/main">
               <a:ext uri="{FF2B5EF4-FFF2-40B4-BE49-F238E27FC236}">
-                <a16:creationId xmlns:a16="http://schemas.microsoft.com/office/drawing/2014/main" id="{A8812508-C055-4925-90DD-417572F4AC47}"/>
+                <a16:creationId xmlns:a16="http://schemas.microsoft.com/office/drawing/2014/main" id="{B31AB352-8AEE-4E49-84B9-CC1763E5D397}"/>
               </a:ext>
             </a:extLst>
           </p:cNvPr>
@@ -1471,7 +1471,7 @@
           <p:cNvPr id="3" name="">
             <a:extLst xmlns:a="http://schemas.openxmlformats.org/drawingml/2006/main">
               <a:ext uri="{FF2B5EF4-FFF2-40B4-BE49-F238E27FC236}">
-                <a16:creationId xmlns:a16="http://schemas.microsoft.com/office/drawing/2014/main" id="{CC55709B-726D-4B73-84FF-26E71E8310C8}"/>
+                <a16:creationId xmlns:a16="http://schemas.microsoft.com/office/drawing/2014/main" id="{1D391048-DB9A-42E7-9652-F7A6A60CA937}"/>
               </a:ext>
             </a:extLst>
           </p:cNvPr>
@@ -1504,7 +1504,7 @@
           <p:cNvPr id="4" name="">
             <a:extLst xmlns:a="http://schemas.openxmlformats.org/drawingml/2006/main">
               <a:ext uri="{FF2B5EF4-FFF2-40B4-BE49-F238E27FC236}">
-                <a16:creationId xmlns:a16="http://schemas.microsoft.com/office/drawing/2014/main" id="{E9BD4BEA-36C8-4E1C-ACAD-04DB1D01191A}"/>
+                <a16:creationId xmlns:a16="http://schemas.microsoft.com/office/drawing/2014/main" id="{2A5E72DD-9E24-4244-B8CA-04C77E22C60C}"/>
               </a:ext>
             </a:extLst>
           </p:cNvPr>
@@ -1564,7 +1564,7 @@
           <p:cNvPr id="5" name="">
             <a:extLst xmlns:a="http://schemas.openxmlformats.org/drawingml/2006/main">
               <a:ext uri="{FF2B5EF4-FFF2-40B4-BE49-F238E27FC236}">
-                <a16:creationId xmlns:a16="http://schemas.microsoft.com/office/drawing/2014/main" id="{DC8FF025-D7E3-4939-9B87-9A90AF883642}"/>
+                <a16:creationId xmlns:a16="http://schemas.microsoft.com/office/drawing/2014/main" id="{0E2D8DD0-6DB7-4DA2-AA88-DA94A573C147}"/>
               </a:ext>
             </a:extLst>
           </p:cNvPr>
@@ -1641,7 +1641,7 @@
           <p:cNvPr id="6" name="">
             <a:extLst xmlns:a="http://schemas.openxmlformats.org/drawingml/2006/main">
               <a:ext uri="{FF2B5EF4-FFF2-40B4-BE49-F238E27FC236}">
-                <a16:creationId xmlns:a16="http://schemas.microsoft.com/office/drawing/2014/main" id="{7A8CC892-E86A-4D85-9EE4-8AB3FCF5598C}"/>
+                <a16:creationId xmlns:a16="http://schemas.microsoft.com/office/drawing/2014/main" id="{E84AB896-030D-4594-AD89-1A1090F9B994}"/>
               </a:ext>
             </a:extLst>
           </p:cNvPr>
@@ -1701,7 +1701,7 @@
           <p:cNvPr id="7" name="">
             <a:extLst xmlns:a="http://schemas.openxmlformats.org/drawingml/2006/main">
               <a:ext uri="{FF2B5EF4-FFF2-40B4-BE49-F238E27FC236}">
-                <a16:creationId xmlns:a16="http://schemas.microsoft.com/office/drawing/2014/main" id="{32E97D13-B46B-44A4-8E1C-6D6188E29964}"/>
+                <a16:creationId xmlns:a16="http://schemas.microsoft.com/office/drawing/2014/main" id="{F77FCE06-8B2E-4D85-8FD8-2E8D678561BE}"/>
               </a:ext>
             </a:extLst>
           </p:cNvPr>
@@ -1736,7 +1736,7 @@
           <p:cNvPr id="8" name="">
             <a:extLst xmlns:a="http://schemas.openxmlformats.org/drawingml/2006/main">
               <a:ext uri="{FF2B5EF4-FFF2-40B4-BE49-F238E27FC236}">
-                <a16:creationId xmlns:a16="http://schemas.microsoft.com/office/drawing/2014/main" id="{7C700863-0912-434A-9236-B498CD6E070C}"/>
+                <a16:creationId xmlns:a16="http://schemas.microsoft.com/office/drawing/2014/main" id="{C30DBDCD-00B1-40E7-A281-4E51A5918BEE}"/>
               </a:ext>
             </a:extLst>
           </p:cNvPr>
@@ -1769,7 +1769,7 @@
           <p:cNvPr id="9" name="">
             <a:extLst xmlns:a="http://schemas.openxmlformats.org/drawingml/2006/main">
               <a:ext uri="{FF2B5EF4-FFF2-40B4-BE49-F238E27FC236}">
-                <a16:creationId xmlns:a16="http://schemas.microsoft.com/office/drawing/2014/main" id="{0C2D094C-12DC-4CC6-9511-7CBDD1845A09}"/>
+                <a16:creationId xmlns:a16="http://schemas.microsoft.com/office/drawing/2014/main" id="{B1A3CE28-385B-46B2-9E82-4DB9A4B6B252}"/>
               </a:ext>
             </a:extLst>
           </p:cNvPr>
@@ -1829,7 +1829,7 @@
           <p:cNvPr id="10" name="">
             <a:extLst xmlns:a="http://schemas.openxmlformats.org/drawingml/2006/main">
               <a:ext uri="{FF2B5EF4-FFF2-40B4-BE49-F238E27FC236}">
-                <a16:creationId xmlns:a16="http://schemas.microsoft.com/office/drawing/2014/main" id="{46CC4F62-5E63-4EE5-99A8-3CF4E965628A}"/>
+                <a16:creationId xmlns:a16="http://schemas.microsoft.com/office/drawing/2014/main" id="{FEEA79FF-3FDB-4744-A49E-46C2FAED07A0}"/>
               </a:ext>
             </a:extLst>
           </p:cNvPr>
@@ -1923,7 +1923,7 @@
           <p:cNvPr id="11" name="">
             <a:extLst xmlns:a="http://schemas.openxmlformats.org/drawingml/2006/main">
               <a:ext uri="{FF2B5EF4-FFF2-40B4-BE49-F238E27FC236}">
-                <a16:creationId xmlns:a16="http://schemas.microsoft.com/office/drawing/2014/main" id="{4FB9B210-1AE6-41B0-9737-181EC7E47D59}"/>
+                <a16:creationId xmlns:a16="http://schemas.microsoft.com/office/drawing/2014/main" id="{44039C93-8D51-4A4C-8A36-56AEAE1DD3E9}"/>
               </a:ext>
             </a:extLst>
           </p:cNvPr>
@@ -1958,7 +1958,7 @@
           <p:cNvPr id="12" name="">
             <a:extLst xmlns:a="http://schemas.openxmlformats.org/drawingml/2006/main">
               <a:ext uri="{FF2B5EF4-FFF2-40B4-BE49-F238E27FC236}">
-                <a16:creationId xmlns:a16="http://schemas.microsoft.com/office/drawing/2014/main" id="{D86AD657-B943-47FE-909A-701277AD5538}"/>
+                <a16:creationId xmlns:a16="http://schemas.microsoft.com/office/drawing/2014/main" id="{550EF5B2-B8C9-498D-81F5-005BF6734643}"/>
               </a:ext>
             </a:extLst>
           </p:cNvPr>
@@ -1991,7 +1991,7 @@
           <p:cNvPr id="13" name="">
             <a:extLst xmlns:a="http://schemas.openxmlformats.org/drawingml/2006/main">
               <a:ext uri="{FF2B5EF4-FFF2-40B4-BE49-F238E27FC236}">
-                <a16:creationId xmlns:a16="http://schemas.microsoft.com/office/drawing/2014/main" id="{C4AE2713-2815-4D43-AA4B-0F797E567F8C}"/>
+                <a16:creationId xmlns:a16="http://schemas.microsoft.com/office/drawing/2014/main" id="{A35DA2CB-3C02-4704-BCDA-2159DBFC17DB}"/>
               </a:ext>
             </a:extLst>
           </p:cNvPr>
@@ -2051,7 +2051,7 @@
           <p:cNvPr id="14" name="">
             <a:extLst xmlns:a="http://schemas.openxmlformats.org/drawingml/2006/main">
               <a:ext uri="{FF2B5EF4-FFF2-40B4-BE49-F238E27FC236}">
-                <a16:creationId xmlns:a16="http://schemas.microsoft.com/office/drawing/2014/main" id="{841E1E39-6505-4C75-A6AF-0FBA2B49E98F}"/>
+                <a16:creationId xmlns:a16="http://schemas.microsoft.com/office/drawing/2014/main" id="{DBF51706-2F2C-4A51-8EBA-7DC24E126CA0}"/>
               </a:ext>
             </a:extLst>
           </p:cNvPr>
@@ -2111,19 +2111,19 @@
           <p:cNvPr id="15" name="">
             <a:extLst xmlns:a="http://schemas.openxmlformats.org/drawingml/2006/main">
               <a:ext uri="{FF2B5EF4-FFF2-40B4-BE49-F238E27FC236}">
-                <a16:creationId xmlns:a16="http://schemas.microsoft.com/office/drawing/2014/main" id="{775AB78C-3ADB-4C94-9381-0920FCE6C917}"/>
-              </a:ext>
-            </a:extLst>
-          </p:cNvPr>
-          <p:cNvSpPr>
-            <a:spLocks xmlns:a="http://schemas.openxmlformats.org/drawingml/2006/main" noGrp="1"/>
-          </p:cNvSpPr>
-          <p:nvPr/>
-        </p:nvSpPr>
-        <p:spPr>
-          <a:xfrm xmlns:a="http://schemas.openxmlformats.org/drawingml/2006/main">
-            <a:off x="514350" y="6400800"/>
-            <a:ext cx="8572500" cy="171450"/>
+                <a16:creationId xmlns:a16="http://schemas.microsoft.com/office/drawing/2014/main" id="{46E9F4C7-6F8E-4396-B54B-957024C0510B}"/>
+              </a:ext>
+            </a:extLst>
+          </p:cNvPr>
+          <p:cNvSpPr>
+            <a:spLocks xmlns:a="http://schemas.openxmlformats.org/drawingml/2006/main" noGrp="1"/>
+          </p:cNvSpPr>
+          <p:nvPr/>
+        </p:nvSpPr>
+        <p:spPr>
+          <a:xfrm xmlns:a="http://schemas.openxmlformats.org/drawingml/2006/main">
+            <a:off x="514350" y="6381750"/>
+            <a:ext cx="8763000" cy="190500"/>
           </a:xfrm>
           <a:prstGeom xmlns:a="http://schemas.openxmlformats.org/drawingml/2006/main" prst="rect">
             <a:avLst/>
@@ -2149,14 +2149,14 @@
           <a:lstStyle xmlns:a="http://schemas.openxmlformats.org/drawingml/2006/main"/>
           <a:p xmlns:a="http://schemas.openxmlformats.org/drawingml/2006/main">
             <a:pPr algn="l">
-              <a:defRPr sz="713" b="0">
+              <a:defRPr sz="825" b="0">
                 <a:solidFill>
                   <a:srgbClr val="475569"/>
                 </a:solidFill>
               </a:defRPr>
             </a:pPr>
             <a:r>
-              <a:rPr sz="713" b="0">
+              <a:rPr sz="825" b="0">
                 <a:solidFill>
                   <a:srgbClr val="475569"/>
                 </a:solidFill>
@@ -2171,19 +2171,19 @@
           <p:cNvPr id="16" name="">
             <a:extLst xmlns:a="http://schemas.openxmlformats.org/drawingml/2006/main">
               <a:ext uri="{FF2B5EF4-FFF2-40B4-BE49-F238E27FC236}">
-                <a16:creationId xmlns:a16="http://schemas.microsoft.com/office/drawing/2014/main" id="{3335EE30-3151-4DE6-8C9F-2FDA87CE48F7}"/>
-              </a:ext>
-            </a:extLst>
-          </p:cNvPr>
-          <p:cNvSpPr>
-            <a:spLocks xmlns:a="http://schemas.openxmlformats.org/drawingml/2006/main" noGrp="1"/>
-          </p:cNvSpPr>
-          <p:nvPr/>
-        </p:nvSpPr>
-        <p:spPr>
-          <a:xfrm xmlns:a="http://schemas.openxmlformats.org/drawingml/2006/main">
-            <a:off x="11049000" y="6400800"/>
-            <a:ext cx="628650" cy="171450"/>
+                <a16:creationId xmlns:a16="http://schemas.microsoft.com/office/drawing/2014/main" id="{1D2DA215-F1A7-4249-B383-C669E0B812ED}"/>
+              </a:ext>
+            </a:extLst>
+          </p:cNvPr>
+          <p:cNvSpPr>
+            <a:spLocks xmlns:a="http://schemas.openxmlformats.org/drawingml/2006/main" noGrp="1"/>
+          </p:cNvSpPr>
+          <p:nvPr/>
+        </p:nvSpPr>
+        <p:spPr>
+          <a:xfrm xmlns:a="http://schemas.openxmlformats.org/drawingml/2006/main">
+            <a:off x="11049000" y="6381750"/>
+            <a:ext cx="628650" cy="190500"/>
           </a:xfrm>
           <a:prstGeom xmlns:a="http://schemas.openxmlformats.org/drawingml/2006/main" prst="rect">
             <a:avLst/>
@@ -2209,14 +2209,14 @@
           <a:lstStyle xmlns:a="http://schemas.openxmlformats.org/drawingml/2006/main"/>
           <a:p xmlns:a="http://schemas.openxmlformats.org/drawingml/2006/main">
             <a:pPr algn="r">
-              <a:defRPr sz="750" b="0">
+              <a:defRPr sz="825" b="0">
                 <a:solidFill>
                   <a:srgbClr val="475569"/>
                 </a:solidFill>
               </a:defRPr>
             </a:pPr>
             <a:r>
-              <a:rPr sz="750" b="0">
+              <a:rPr sz="825" b="0">
                 <a:solidFill>
                   <a:srgbClr val="475569"/>
                 </a:solidFill>
@@ -2229,7 +2229,7 @@
     </p:spTree>
     <p:extLst>
       <p:ext uri="{BB962C8B-B14F-4D97-AF65-F5344CB8AC3E}">
-        <p14:creationId xmlns:p14="http://schemas.microsoft.com/office/powerpoint/2010/main" val="133182241"/>
+        <p14:creationId xmlns:p14="http://schemas.microsoft.com/office/powerpoint/2010/main" val="618498797"/>
       </p:ext>
     </p:extLst>
   </p:cSld>
@@ -2260,7 +2260,7 @@
           <p:cNvPr id="1" name="Slide Number Placeholder 5">
             <a:extLst xmlns:a="http://schemas.openxmlformats.org/drawingml/2006/main">
               <a:ext uri="{FF2B5EF4-FFF2-40B4-BE49-F238E27FC236}">
-                <a16:creationId xmlns:a16="http://schemas.microsoft.com/office/drawing/2014/main" id="{07657F96-14BB-4F34-A3C2-E58CAF19D6CA}"/>
+                <a16:creationId xmlns:a16="http://schemas.microsoft.com/office/drawing/2014/main" id="{439AD580-5634-40B8-ADF2-F75BA71FC2A9}"/>
               </a:ext>
             </a:extLst>
           </p:cNvPr>
@@ -2292,7 +2292,7 @@
           <p:cNvPr id="2" name="">
             <a:extLst xmlns:a="http://schemas.openxmlformats.org/drawingml/2006/main">
               <a:ext uri="{FF2B5EF4-FFF2-40B4-BE49-F238E27FC236}">
-                <a16:creationId xmlns:a16="http://schemas.microsoft.com/office/drawing/2014/main" id="{8695325B-575F-496F-B242-5FBD1AD30B64}"/>
+                <a16:creationId xmlns:a16="http://schemas.microsoft.com/office/drawing/2014/main" id="{1A1FEC54-DBD7-4DDC-BA43-57E136C3BE6E}"/>
               </a:ext>
             </a:extLst>
           </p:cNvPr>
@@ -2352,7 +2352,7 @@
           <p:cNvPr id="3" name="">
             <a:extLst xmlns:a="http://schemas.openxmlformats.org/drawingml/2006/main">
               <a:ext uri="{FF2B5EF4-FFF2-40B4-BE49-F238E27FC236}">
-                <a16:creationId xmlns:a16="http://schemas.microsoft.com/office/drawing/2014/main" id="{7EF79534-8A9C-4DB3-AC6F-FFDF714EC5F2}"/>
+                <a16:creationId xmlns:a16="http://schemas.microsoft.com/office/drawing/2014/main" id="{D758CE13-55B9-4052-92D5-3E6B978E511A}"/>
               </a:ext>
             </a:extLst>
           </p:cNvPr>
@@ -2385,7 +2385,7 @@
           <p:cNvPr id="4" name="">
             <a:extLst xmlns:a="http://schemas.openxmlformats.org/drawingml/2006/main">
               <a:ext uri="{FF2B5EF4-FFF2-40B4-BE49-F238E27FC236}">
-                <a16:creationId xmlns:a16="http://schemas.microsoft.com/office/drawing/2014/main" id="{2DF93C77-F30F-4635-AAA4-A40AA73B6497}"/>
+                <a16:creationId xmlns:a16="http://schemas.microsoft.com/office/drawing/2014/main" id="{B01677B0-D21C-4642-B31C-D27D501F08A5}"/>
               </a:ext>
             </a:extLst>
           </p:cNvPr>
@@ -2462,7 +2462,7 @@
           <p:cNvPr id="5" name="">
             <a:extLst xmlns:a="http://schemas.openxmlformats.org/drawingml/2006/main">
               <a:ext uri="{FF2B5EF4-FFF2-40B4-BE49-F238E27FC236}">
-                <a16:creationId xmlns:a16="http://schemas.microsoft.com/office/drawing/2014/main" id="{31227DE2-7E41-4999-8D99-5F8982496044}"/>
+                <a16:creationId xmlns:a16="http://schemas.microsoft.com/office/drawing/2014/main" id="{8263C62E-8E71-4866-A821-CCBCA181C090}"/>
               </a:ext>
             </a:extLst>
           </p:cNvPr>
@@ -2495,7 +2495,7 @@
           <p:cNvPr id="6" name="">
             <a:extLst xmlns:a="http://schemas.openxmlformats.org/drawingml/2006/main">
               <a:ext uri="{FF2B5EF4-FFF2-40B4-BE49-F238E27FC236}">
-                <a16:creationId xmlns:a16="http://schemas.microsoft.com/office/drawing/2014/main" id="{33991E5A-E67E-46B7-8364-80869F17B5A8}"/>
+                <a16:creationId xmlns:a16="http://schemas.microsoft.com/office/drawing/2014/main" id="{E5EAF2FA-F80D-487C-A481-EAFE7C13CF49}"/>
               </a:ext>
             </a:extLst>
           </p:cNvPr>
@@ -2589,7 +2589,7 @@
           <p:cNvPr id="7" name="">
             <a:extLst xmlns:a="http://schemas.openxmlformats.org/drawingml/2006/main">
               <a:ext uri="{FF2B5EF4-FFF2-40B4-BE49-F238E27FC236}">
-                <a16:creationId xmlns:a16="http://schemas.microsoft.com/office/drawing/2014/main" id="{53BEBDEC-75C2-4138-93BA-C02BFBC977D9}"/>
+                <a16:creationId xmlns:a16="http://schemas.microsoft.com/office/drawing/2014/main" id="{7DD49675-B6FD-4C24-82A4-344050136857}"/>
               </a:ext>
             </a:extLst>
           </p:cNvPr>
@@ -2666,7 +2666,7 @@
           <p:cNvPr id="8" name="">
             <a:extLst xmlns:a="http://schemas.openxmlformats.org/drawingml/2006/main">
               <a:ext uri="{FF2B5EF4-FFF2-40B4-BE49-F238E27FC236}">
-                <a16:creationId xmlns:a16="http://schemas.microsoft.com/office/drawing/2014/main" id="{17455D43-B564-4308-A296-888C7E38F7AB}"/>
+                <a16:creationId xmlns:a16="http://schemas.microsoft.com/office/drawing/2014/main" id="{6D85FCB2-76FB-41D5-B290-4C4FE4CC83D3}"/>
               </a:ext>
             </a:extLst>
           </p:cNvPr>
@@ -2701,7 +2701,7 @@
           <p:cNvPr id="9" name="">
             <a:extLst xmlns:a="http://schemas.openxmlformats.org/drawingml/2006/main">
               <a:ext uri="{FF2B5EF4-FFF2-40B4-BE49-F238E27FC236}">
-                <a16:creationId xmlns:a16="http://schemas.microsoft.com/office/drawing/2014/main" id="{5F1B45B9-983D-488E-BC39-0A55881BC745}"/>
+                <a16:creationId xmlns:a16="http://schemas.microsoft.com/office/drawing/2014/main" id="{167948EF-CEBF-42F2-ADDF-72EE76118CAC}"/>
               </a:ext>
             </a:extLst>
           </p:cNvPr>
@@ -2761,7 +2761,7 @@
           <p:cNvPr id="10" name="">
             <a:extLst xmlns:a="http://schemas.openxmlformats.org/drawingml/2006/main">
               <a:ext uri="{FF2B5EF4-FFF2-40B4-BE49-F238E27FC236}">
-                <a16:creationId xmlns:a16="http://schemas.microsoft.com/office/drawing/2014/main" id="{B87F2FBE-6D3E-403C-805D-1E42DD6F871B}"/>
+                <a16:creationId xmlns:a16="http://schemas.microsoft.com/office/drawing/2014/main" id="{17A161A2-14A4-4791-B037-7CF0D875D8F3}"/>
               </a:ext>
             </a:extLst>
           </p:cNvPr>
@@ -2872,7 +2872,7 @@
           <p:cNvPr id="11" name="">
             <a:extLst xmlns:a="http://schemas.openxmlformats.org/drawingml/2006/main">
               <a:ext uri="{FF2B5EF4-FFF2-40B4-BE49-F238E27FC236}">
-                <a16:creationId xmlns:a16="http://schemas.microsoft.com/office/drawing/2014/main" id="{28F7153B-A92C-4E4C-85CA-F91D6B66FFE1}"/>
+                <a16:creationId xmlns:a16="http://schemas.microsoft.com/office/drawing/2014/main" id="{4F8EB74D-3A75-4113-B885-C2307EC113D1}"/>
               </a:ext>
             </a:extLst>
           </p:cNvPr>
@@ -2932,7 +2932,7 @@
           <p:cNvPr id="12" name="">
             <a:extLst xmlns:a="http://schemas.openxmlformats.org/drawingml/2006/main">
               <a:ext uri="{FF2B5EF4-FFF2-40B4-BE49-F238E27FC236}">
-                <a16:creationId xmlns:a16="http://schemas.microsoft.com/office/drawing/2014/main" id="{4D866074-AD8A-44A9-AE62-29F16263F6C2}"/>
+                <a16:creationId xmlns:a16="http://schemas.microsoft.com/office/drawing/2014/main" id="{9B4F01E7-CD83-485E-A668-1764B50542E2}"/>
               </a:ext>
             </a:extLst>
           </p:cNvPr>
@@ -2967,19 +2967,19 @@
           <p:cNvPr id="13" name="">
             <a:extLst xmlns:a="http://schemas.openxmlformats.org/drawingml/2006/main">
               <a:ext uri="{FF2B5EF4-FFF2-40B4-BE49-F238E27FC236}">
-                <a16:creationId xmlns:a16="http://schemas.microsoft.com/office/drawing/2014/main" id="{F1C52E3E-E084-481F-9548-6760F792F13E}"/>
-              </a:ext>
-            </a:extLst>
-          </p:cNvPr>
-          <p:cNvSpPr>
-            <a:spLocks xmlns:a="http://schemas.openxmlformats.org/drawingml/2006/main" noGrp="1"/>
-          </p:cNvSpPr>
-          <p:nvPr/>
-        </p:nvSpPr>
-        <p:spPr>
-          <a:xfrm xmlns:a="http://schemas.openxmlformats.org/drawingml/2006/main">
-            <a:off x="9086850" y="4429125"/>
-            <a:ext cx="1104900" cy="123825"/>
+                <a16:creationId xmlns:a16="http://schemas.microsoft.com/office/drawing/2014/main" id="{366464D9-3DF4-40DD-BA04-0AF57973C794}"/>
+              </a:ext>
+            </a:extLst>
+          </p:cNvPr>
+          <p:cNvSpPr>
+            <a:spLocks xmlns:a="http://schemas.openxmlformats.org/drawingml/2006/main" noGrp="1"/>
+          </p:cNvSpPr>
+          <p:nvPr/>
+        </p:nvSpPr>
+        <p:spPr>
+          <a:xfrm xmlns:a="http://schemas.openxmlformats.org/drawingml/2006/main">
+            <a:off x="9086850" y="4419600"/>
+            <a:ext cx="1104900" cy="142875"/>
           </a:xfrm>
           <a:prstGeom xmlns:a="http://schemas.openxmlformats.org/drawingml/2006/main" prst="rect">
             <a:avLst/>
@@ -3005,14 +3005,14 @@
           <a:lstStyle xmlns:a="http://schemas.openxmlformats.org/drawingml/2006/main"/>
           <a:p xmlns:a="http://schemas.openxmlformats.org/drawingml/2006/main">
             <a:pPr algn="ctr">
-              <a:defRPr sz="638" b="1">
+              <a:defRPr sz="713" b="1">
                 <a:solidFill>
                   <a:srgbClr val="FFFFFF"/>
                 </a:solidFill>
               </a:defRPr>
             </a:pPr>
             <a:r>
-              <a:rPr sz="638" b="1">
+              <a:rPr sz="713" b="1">
                 <a:solidFill>
                   <a:srgbClr val="FFFFFF"/>
                 </a:solidFill>
@@ -3027,19 +3027,19 @@
           <p:cNvPr id="14" name="">
             <a:extLst xmlns:a="http://schemas.openxmlformats.org/drawingml/2006/main">
               <a:ext uri="{FF2B5EF4-FFF2-40B4-BE49-F238E27FC236}">
-                <a16:creationId xmlns:a16="http://schemas.microsoft.com/office/drawing/2014/main" id="{77214FDF-429B-402C-923E-9C9B5F727ADC}"/>
-              </a:ext>
-            </a:extLst>
-          </p:cNvPr>
-          <p:cNvSpPr>
-            <a:spLocks xmlns:a="http://schemas.openxmlformats.org/drawingml/2006/main" noGrp="1"/>
-          </p:cNvSpPr>
-          <p:nvPr/>
-        </p:nvSpPr>
-        <p:spPr>
-          <a:xfrm xmlns:a="http://schemas.openxmlformats.org/drawingml/2006/main">
-            <a:off x="514350" y="6400800"/>
-            <a:ext cx="8572500" cy="171450"/>
+                <a16:creationId xmlns:a16="http://schemas.microsoft.com/office/drawing/2014/main" id="{CFE28C9B-5ADA-488C-BBF4-B5C76AB45A28}"/>
+              </a:ext>
+            </a:extLst>
+          </p:cNvPr>
+          <p:cNvSpPr>
+            <a:spLocks xmlns:a="http://schemas.openxmlformats.org/drawingml/2006/main" noGrp="1"/>
+          </p:cNvSpPr>
+          <p:nvPr/>
+        </p:nvSpPr>
+        <p:spPr>
+          <a:xfrm xmlns:a="http://schemas.openxmlformats.org/drawingml/2006/main">
+            <a:off x="514350" y="6381750"/>
+            <a:ext cx="8763000" cy="190500"/>
           </a:xfrm>
           <a:prstGeom xmlns:a="http://schemas.openxmlformats.org/drawingml/2006/main" prst="rect">
             <a:avLst/>
@@ -3065,14 +3065,14 @@
           <a:lstStyle xmlns:a="http://schemas.openxmlformats.org/drawingml/2006/main"/>
           <a:p xmlns:a="http://schemas.openxmlformats.org/drawingml/2006/main">
             <a:pPr algn="l">
-              <a:defRPr sz="713" b="0">
+              <a:defRPr sz="825" b="0">
                 <a:solidFill>
                   <a:srgbClr val="475569"/>
                 </a:solidFill>
               </a:defRPr>
             </a:pPr>
             <a:r>
-              <a:rPr sz="713" b="0">
+              <a:rPr sz="825" b="0">
                 <a:solidFill>
                   <a:srgbClr val="475569"/>
                 </a:solidFill>
@@ -3087,19 +3087,19 @@
           <p:cNvPr id="15" name="">
             <a:extLst xmlns:a="http://schemas.openxmlformats.org/drawingml/2006/main">
               <a:ext uri="{FF2B5EF4-FFF2-40B4-BE49-F238E27FC236}">
-                <a16:creationId xmlns:a16="http://schemas.microsoft.com/office/drawing/2014/main" id="{B5C27D05-1158-4E01-B7D9-6A8F5CAA4E7D}"/>
-              </a:ext>
-            </a:extLst>
-          </p:cNvPr>
-          <p:cNvSpPr>
-            <a:spLocks xmlns:a="http://schemas.openxmlformats.org/drawingml/2006/main" noGrp="1"/>
-          </p:cNvSpPr>
-          <p:nvPr/>
-        </p:nvSpPr>
-        <p:spPr>
-          <a:xfrm xmlns:a="http://schemas.openxmlformats.org/drawingml/2006/main">
-            <a:off x="11049000" y="6400800"/>
-            <a:ext cx="628650" cy="171450"/>
+                <a16:creationId xmlns:a16="http://schemas.microsoft.com/office/drawing/2014/main" id="{458A01E0-A368-4FC5-B38B-EADAB7134311}"/>
+              </a:ext>
+            </a:extLst>
+          </p:cNvPr>
+          <p:cNvSpPr>
+            <a:spLocks xmlns:a="http://schemas.openxmlformats.org/drawingml/2006/main" noGrp="1"/>
+          </p:cNvSpPr>
+          <p:nvPr/>
+        </p:nvSpPr>
+        <p:spPr>
+          <a:xfrm xmlns:a="http://schemas.openxmlformats.org/drawingml/2006/main">
+            <a:off x="11049000" y="6381750"/>
+            <a:ext cx="628650" cy="190500"/>
           </a:xfrm>
           <a:prstGeom xmlns:a="http://schemas.openxmlformats.org/drawingml/2006/main" prst="rect">
             <a:avLst/>
@@ -3125,14 +3125,14 @@
           <a:lstStyle xmlns:a="http://schemas.openxmlformats.org/drawingml/2006/main"/>
           <a:p xmlns:a="http://schemas.openxmlformats.org/drawingml/2006/main">
             <a:pPr algn="r">
-              <a:defRPr sz="750" b="0">
+              <a:defRPr sz="825" b="0">
                 <a:solidFill>
                   <a:srgbClr val="475569"/>
                 </a:solidFill>
               </a:defRPr>
             </a:pPr>
             <a:r>
-              <a:rPr sz="750" b="0">
+              <a:rPr sz="825" b="0">
                 <a:solidFill>
                   <a:srgbClr val="475569"/>
                 </a:solidFill>
@@ -3145,7 +3145,7 @@
     </p:spTree>
     <p:extLst>
       <p:ext uri="{BB962C8B-B14F-4D97-AF65-F5344CB8AC3E}">
-        <p14:creationId xmlns:p14="http://schemas.microsoft.com/office/powerpoint/2010/main" val="1207299339"/>
+        <p14:creationId xmlns:p14="http://schemas.microsoft.com/office/powerpoint/2010/main" val="46300691"/>
       </p:ext>
     </p:extLst>
   </p:cSld>
@@ -3176,7 +3176,7 @@
           <p:cNvPr id="1" name="Slide Number Placeholder 5">
             <a:extLst xmlns:a="http://schemas.openxmlformats.org/drawingml/2006/main">
               <a:ext uri="{FF2B5EF4-FFF2-40B4-BE49-F238E27FC236}">
-                <a16:creationId xmlns:a16="http://schemas.microsoft.com/office/drawing/2014/main" id="{07657F96-14BB-4F34-A3C2-E58CAF19D6CA}"/>
+                <a16:creationId xmlns:a16="http://schemas.microsoft.com/office/drawing/2014/main" id="{439AD580-5634-40B8-ADF2-F75BA71FC2A9}"/>
               </a:ext>
             </a:extLst>
           </p:cNvPr>
@@ -3208,7 +3208,7 @@
           <p:cNvPr id="2" name="">
             <a:extLst xmlns:a="http://schemas.openxmlformats.org/drawingml/2006/main">
               <a:ext uri="{FF2B5EF4-FFF2-40B4-BE49-F238E27FC236}">
-                <a16:creationId xmlns:a16="http://schemas.microsoft.com/office/drawing/2014/main" id="{C9B053D1-D924-45C2-BA0F-9039314C3F84}"/>
+                <a16:creationId xmlns:a16="http://schemas.microsoft.com/office/drawing/2014/main" id="{102C8A45-E72E-4CA9-B241-6AE2AC7F344C}"/>
               </a:ext>
             </a:extLst>
           </p:cNvPr>
@@ -3241,7 +3241,7 @@
           <p:cNvPr id="3" name="">
             <a:extLst xmlns:a="http://schemas.openxmlformats.org/drawingml/2006/main">
               <a:ext uri="{FF2B5EF4-FFF2-40B4-BE49-F238E27FC236}">
-                <a16:creationId xmlns:a16="http://schemas.microsoft.com/office/drawing/2014/main" id="{4C6E1B64-3219-4FB5-9BE1-747EA517B89B}"/>
+                <a16:creationId xmlns:a16="http://schemas.microsoft.com/office/drawing/2014/main" id="{5FE9AA9B-D1E9-41AB-9ECB-65F1C8268CE6}"/>
               </a:ext>
             </a:extLst>
           </p:cNvPr>
@@ -3274,7 +3274,7 @@
           <p:cNvPr id="4" name="">
             <a:extLst xmlns:a="http://schemas.openxmlformats.org/drawingml/2006/main">
               <a:ext uri="{FF2B5EF4-FFF2-40B4-BE49-F238E27FC236}">
-                <a16:creationId xmlns:a16="http://schemas.microsoft.com/office/drawing/2014/main" id="{0D0C31D3-2403-4D98-8275-5F10D90BA9D4}"/>
+                <a16:creationId xmlns:a16="http://schemas.microsoft.com/office/drawing/2014/main" id="{D667229C-44AB-4D09-A26D-4B3AE466F0D5}"/>
               </a:ext>
             </a:extLst>
           </p:cNvPr>
@@ -3334,7 +3334,7 @@
           <p:cNvPr id="5" name="">
             <a:extLst xmlns:a="http://schemas.openxmlformats.org/drawingml/2006/main">
               <a:ext uri="{FF2B5EF4-FFF2-40B4-BE49-F238E27FC236}">
-                <a16:creationId xmlns:a16="http://schemas.microsoft.com/office/drawing/2014/main" id="{6E7863E1-1218-47DA-BC53-F6246AF1D87C}"/>
+                <a16:creationId xmlns:a16="http://schemas.microsoft.com/office/drawing/2014/main" id="{E255CEA1-E4D5-429E-8167-99EA515E95BB}"/>
               </a:ext>
             </a:extLst>
           </p:cNvPr>
@@ -3394,7 +3394,7 @@
           <p:cNvPr id="6" name="">
             <a:extLst xmlns:a="http://schemas.openxmlformats.org/drawingml/2006/main">
               <a:ext uri="{FF2B5EF4-FFF2-40B4-BE49-F238E27FC236}">
-                <a16:creationId xmlns:a16="http://schemas.microsoft.com/office/drawing/2014/main" id="{DE471B9E-CB74-49C4-B460-2C2B665A9EA7}"/>
+                <a16:creationId xmlns:a16="http://schemas.microsoft.com/office/drawing/2014/main" id="{7D8B2BF5-E22E-4303-8935-F0DD036050AA}"/>
               </a:ext>
             </a:extLst>
           </p:cNvPr>
@@ -3454,7 +3454,7 @@
           <p:cNvPr id="7" name="">
             <a:extLst xmlns:a="http://schemas.openxmlformats.org/drawingml/2006/main">
               <a:ext uri="{FF2B5EF4-FFF2-40B4-BE49-F238E27FC236}">
-                <a16:creationId xmlns:a16="http://schemas.microsoft.com/office/drawing/2014/main" id="{41577412-2A9E-4A74-8C2C-B6D19E54483A}"/>
+                <a16:creationId xmlns:a16="http://schemas.microsoft.com/office/drawing/2014/main" id="{5E203976-60E7-4557-9CB3-8F71BB3A2B74}"/>
               </a:ext>
             </a:extLst>
           </p:cNvPr>
@@ -3514,7 +3514,7 @@
           <p:cNvPr id="8" name="">
             <a:extLst xmlns:a="http://schemas.openxmlformats.org/drawingml/2006/main">
               <a:ext uri="{FF2B5EF4-FFF2-40B4-BE49-F238E27FC236}">
-                <a16:creationId xmlns:a16="http://schemas.microsoft.com/office/drawing/2014/main" id="{58555CC4-BC3C-434D-9973-BA6356709BF8}"/>
+                <a16:creationId xmlns:a16="http://schemas.microsoft.com/office/drawing/2014/main" id="{DEA907C1-91DD-4492-A448-433A5FF581DB}"/>
               </a:ext>
             </a:extLst>
           </p:cNvPr>
@@ -3574,7 +3574,7 @@
           <p:cNvPr id="9" name="">
             <a:extLst xmlns:a="http://schemas.openxmlformats.org/drawingml/2006/main">
               <a:ext uri="{FF2B5EF4-FFF2-40B4-BE49-F238E27FC236}">
-                <a16:creationId xmlns:a16="http://schemas.microsoft.com/office/drawing/2014/main" id="{A044D34E-F143-4599-8AFC-5C40BD45F961}"/>
+                <a16:creationId xmlns:a16="http://schemas.microsoft.com/office/drawing/2014/main" id="{C015A06C-8F2B-4B97-9FE3-C4F3C49ED8C8}"/>
               </a:ext>
             </a:extLst>
           </p:cNvPr>
@@ -3634,7 +3634,7 @@
           <p:cNvPr id="10" name="">
             <a:extLst xmlns:a="http://schemas.openxmlformats.org/drawingml/2006/main">
               <a:ext uri="{FF2B5EF4-FFF2-40B4-BE49-F238E27FC236}">
-                <a16:creationId xmlns:a16="http://schemas.microsoft.com/office/drawing/2014/main" id="{D51463AC-1CF6-4FCF-9BEF-CB2A5B0ECDAE}"/>
+                <a16:creationId xmlns:a16="http://schemas.microsoft.com/office/drawing/2014/main" id="{D7C555DF-D61F-4AB4-904C-37C920C0243E}"/>
               </a:ext>
             </a:extLst>
           </p:cNvPr>
@@ -3694,7 +3694,7 @@
           <p:cNvPr id="11" name="">
             <a:extLst xmlns:a="http://schemas.openxmlformats.org/drawingml/2006/main">
               <a:ext uri="{FF2B5EF4-FFF2-40B4-BE49-F238E27FC236}">
-                <a16:creationId xmlns:a16="http://schemas.microsoft.com/office/drawing/2014/main" id="{027458E0-3DEA-4391-9B0E-61247D98D2DB}"/>
+                <a16:creationId xmlns:a16="http://schemas.microsoft.com/office/drawing/2014/main" id="{0F9C67A4-391A-4738-B6BD-A632482AC3B1}"/>
               </a:ext>
             </a:extLst>
           </p:cNvPr>
@@ -3729,7 +3729,7 @@
           <p:cNvPr id="12" name="">
             <a:extLst xmlns:a="http://schemas.openxmlformats.org/drawingml/2006/main">
               <a:ext uri="{FF2B5EF4-FFF2-40B4-BE49-F238E27FC236}">
-                <a16:creationId xmlns:a16="http://schemas.microsoft.com/office/drawing/2014/main" id="{35250DDC-F576-4985-A99B-3F27E80AB6A4}"/>
+                <a16:creationId xmlns:a16="http://schemas.microsoft.com/office/drawing/2014/main" id="{B3903D57-C49F-4E50-93CE-DBCD910B9835}"/>
               </a:ext>
             </a:extLst>
           </p:cNvPr>
@@ -3806,7 +3806,7 @@
           <p:cNvPr id="13" name="">
             <a:extLst xmlns:a="http://schemas.openxmlformats.org/drawingml/2006/main">
               <a:ext uri="{FF2B5EF4-FFF2-40B4-BE49-F238E27FC236}">
-                <a16:creationId xmlns:a16="http://schemas.microsoft.com/office/drawing/2014/main" id="{9A03A780-C20B-48AA-A134-D7F4699D2893}"/>
+                <a16:creationId xmlns:a16="http://schemas.microsoft.com/office/drawing/2014/main" id="{8CB1FA32-E087-473F-8018-38E868CCB32A}"/>
               </a:ext>
             </a:extLst>
           </p:cNvPr>
@@ -3841,7 +3841,7 @@
           <p:cNvPr id="14" name="">
             <a:extLst xmlns:a="http://schemas.openxmlformats.org/drawingml/2006/main">
               <a:ext uri="{FF2B5EF4-FFF2-40B4-BE49-F238E27FC236}">
-                <a16:creationId xmlns:a16="http://schemas.microsoft.com/office/drawing/2014/main" id="{D18C5B8E-EE14-4609-9A4B-04E04C596DA9}"/>
+                <a16:creationId xmlns:a16="http://schemas.microsoft.com/office/drawing/2014/main" id="{2120EF27-3875-4CB3-B8F6-653F13E469F4}"/>
               </a:ext>
             </a:extLst>
           </p:cNvPr>
@@ -3901,7 +3901,7 @@
           <p:cNvPr id="15" name="">
             <a:extLst xmlns:a="http://schemas.openxmlformats.org/drawingml/2006/main">
               <a:ext uri="{FF2B5EF4-FFF2-40B4-BE49-F238E27FC236}">
-                <a16:creationId xmlns:a16="http://schemas.microsoft.com/office/drawing/2014/main" id="{11910E8D-ED78-485F-A221-10CBF6023311}"/>
+                <a16:creationId xmlns:a16="http://schemas.microsoft.com/office/drawing/2014/main" id="{3D9B8359-B8DF-4757-AAB5-076A857990EB}"/>
               </a:ext>
             </a:extLst>
           </p:cNvPr>
@@ -3961,7 +3961,7 @@
           <p:cNvPr id="16" name="">
             <a:extLst xmlns:a="http://schemas.openxmlformats.org/drawingml/2006/main">
               <a:ext uri="{FF2B5EF4-FFF2-40B4-BE49-F238E27FC236}">
-                <a16:creationId xmlns:a16="http://schemas.microsoft.com/office/drawing/2014/main" id="{95B96F24-4B5E-4000-AD70-C913D8B13B39}"/>
+                <a16:creationId xmlns:a16="http://schemas.microsoft.com/office/drawing/2014/main" id="{802DDA38-1DC8-4244-A195-E1B011EB5E3B}"/>
               </a:ext>
             </a:extLst>
           </p:cNvPr>
@@ -3996,7 +3996,7 @@
           <p:cNvPr id="17" name="">
             <a:extLst xmlns:a="http://schemas.openxmlformats.org/drawingml/2006/main">
               <a:ext uri="{FF2B5EF4-FFF2-40B4-BE49-F238E27FC236}">
-                <a16:creationId xmlns:a16="http://schemas.microsoft.com/office/drawing/2014/main" id="{1C3B6E34-C866-4821-BD13-23A0DF8E474D}"/>
+                <a16:creationId xmlns:a16="http://schemas.microsoft.com/office/drawing/2014/main" id="{84ACECEC-0BDE-4295-87C8-8311960585A9}"/>
               </a:ext>
             </a:extLst>
           </p:cNvPr>
@@ -4056,7 +4056,7 @@
           <p:cNvPr id="18" name="">
             <a:extLst xmlns:a="http://schemas.openxmlformats.org/drawingml/2006/main">
               <a:ext uri="{FF2B5EF4-FFF2-40B4-BE49-F238E27FC236}">
-                <a16:creationId xmlns:a16="http://schemas.microsoft.com/office/drawing/2014/main" id="{0CE89FFB-CFE4-46ED-9DF7-E5C4269D2E40}"/>
+                <a16:creationId xmlns:a16="http://schemas.microsoft.com/office/drawing/2014/main" id="{B41DA608-7BF2-46F0-A8E1-7B90A5116A18}"/>
               </a:ext>
             </a:extLst>
           </p:cNvPr>
@@ -4091,7 +4091,7 @@
           <p:cNvPr id="19" name="">
             <a:extLst xmlns:a="http://schemas.openxmlformats.org/drawingml/2006/main">
               <a:ext uri="{FF2B5EF4-FFF2-40B4-BE49-F238E27FC236}">
-                <a16:creationId xmlns:a16="http://schemas.microsoft.com/office/drawing/2014/main" id="{EC574BB2-CBC7-4D07-A356-4B104D32B7AB}"/>
+                <a16:creationId xmlns:a16="http://schemas.microsoft.com/office/drawing/2014/main" id="{03C94FB6-3A23-43FB-B68E-0A3C34A70964}"/>
               </a:ext>
             </a:extLst>
           </p:cNvPr>
@@ -4168,7 +4168,7 @@
           <p:cNvPr id="20" name="">
             <a:extLst xmlns:a="http://schemas.openxmlformats.org/drawingml/2006/main">
               <a:ext uri="{FF2B5EF4-FFF2-40B4-BE49-F238E27FC236}">
-                <a16:creationId xmlns:a16="http://schemas.microsoft.com/office/drawing/2014/main" id="{AF20F818-35F1-4401-8379-20B75C8A7B2D}"/>
+                <a16:creationId xmlns:a16="http://schemas.microsoft.com/office/drawing/2014/main" id="{28C916B1-5624-4EB7-9BD9-D6F2CE627A14}"/>
               </a:ext>
             </a:extLst>
           </p:cNvPr>
@@ -4228,7 +4228,7 @@
           <p:cNvPr id="21" name="">
             <a:extLst xmlns:a="http://schemas.openxmlformats.org/drawingml/2006/main">
               <a:ext uri="{FF2B5EF4-FFF2-40B4-BE49-F238E27FC236}">
-                <a16:creationId xmlns:a16="http://schemas.microsoft.com/office/drawing/2014/main" id="{72CE758E-1A2E-4416-B29F-AD75056E0151}"/>
+                <a16:creationId xmlns:a16="http://schemas.microsoft.com/office/drawing/2014/main" id="{29A1B4A2-A3FF-4030-BAA1-F5E6DE03AB05}"/>
               </a:ext>
             </a:extLst>
           </p:cNvPr>
@@ -4263,7 +4263,7 @@
           <p:cNvPr id="22" name="">
             <a:extLst xmlns:a="http://schemas.openxmlformats.org/drawingml/2006/main">
               <a:ext uri="{FF2B5EF4-FFF2-40B4-BE49-F238E27FC236}">
-                <a16:creationId xmlns:a16="http://schemas.microsoft.com/office/drawing/2014/main" id="{8B7AD20C-9806-4114-99BC-2D9AB18FFEB6}"/>
+                <a16:creationId xmlns:a16="http://schemas.microsoft.com/office/drawing/2014/main" id="{47DC22BB-C545-4E7D-97CF-F4B805C571EF}"/>
               </a:ext>
             </a:extLst>
           </p:cNvPr>
@@ -4323,7 +4323,7 @@
           <p:cNvPr id="23" name="">
             <a:extLst xmlns:a="http://schemas.openxmlformats.org/drawingml/2006/main">
               <a:ext uri="{FF2B5EF4-FFF2-40B4-BE49-F238E27FC236}">
-                <a16:creationId xmlns:a16="http://schemas.microsoft.com/office/drawing/2014/main" id="{EB1E1290-663D-451A-BE7F-773CEFAE0F12}"/>
+                <a16:creationId xmlns:a16="http://schemas.microsoft.com/office/drawing/2014/main" id="{6DD6654B-142A-4276-9516-5311FC07B8DE}"/>
               </a:ext>
             </a:extLst>
           </p:cNvPr>
@@ -4358,7 +4358,7 @@
           <p:cNvPr id="24" name="">
             <a:extLst xmlns:a="http://schemas.openxmlformats.org/drawingml/2006/main">
               <a:ext uri="{FF2B5EF4-FFF2-40B4-BE49-F238E27FC236}">
-                <a16:creationId xmlns:a16="http://schemas.microsoft.com/office/drawing/2014/main" id="{813802A3-5667-469C-A97E-E7D53326515E}"/>
+                <a16:creationId xmlns:a16="http://schemas.microsoft.com/office/drawing/2014/main" id="{317C2D09-7650-43A8-B440-5F3F3B92265F}"/>
               </a:ext>
             </a:extLst>
           </p:cNvPr>
@@ -4435,7 +4435,7 @@
           <p:cNvPr id="25" name="">
             <a:extLst xmlns:a="http://schemas.openxmlformats.org/drawingml/2006/main">
               <a:ext uri="{FF2B5EF4-FFF2-40B4-BE49-F238E27FC236}">
-                <a16:creationId xmlns:a16="http://schemas.microsoft.com/office/drawing/2014/main" id="{009E7F55-B4D2-4D8F-A573-6AB71EA811F8}"/>
+                <a16:creationId xmlns:a16="http://schemas.microsoft.com/office/drawing/2014/main" id="{4EBD19CA-B429-4344-AF2B-F2C8F4F6CCEE}"/>
               </a:ext>
             </a:extLst>
           </p:cNvPr>
@@ -4470,7 +4470,7 @@
           <p:cNvPr id="26" name="">
             <a:extLst xmlns:a="http://schemas.openxmlformats.org/drawingml/2006/main">
               <a:ext uri="{FF2B5EF4-FFF2-40B4-BE49-F238E27FC236}">
-                <a16:creationId xmlns:a16="http://schemas.microsoft.com/office/drawing/2014/main" id="{089406FB-24C5-45E6-8CAE-82EBA517DF09}"/>
+                <a16:creationId xmlns:a16="http://schemas.microsoft.com/office/drawing/2014/main" id="{2A35697E-D7C4-4D7B-A367-FBBA26251917}"/>
               </a:ext>
             </a:extLst>
           </p:cNvPr>
@@ -4503,7 +4503,7 @@
           <p:cNvPr id="27" name="">
             <a:extLst xmlns:a="http://schemas.openxmlformats.org/drawingml/2006/main">
               <a:ext uri="{FF2B5EF4-FFF2-40B4-BE49-F238E27FC236}">
-                <a16:creationId xmlns:a16="http://schemas.microsoft.com/office/drawing/2014/main" id="{CA7D76FB-3BDF-497B-B7D0-5F7ED6999DFF}"/>
+                <a16:creationId xmlns:a16="http://schemas.microsoft.com/office/drawing/2014/main" id="{BD0E9099-946E-4AE1-86F0-55E5F9AA6054}"/>
               </a:ext>
             </a:extLst>
           </p:cNvPr>
@@ -4563,7 +4563,7 @@
           <p:cNvPr id="28" name="">
             <a:extLst xmlns:a="http://schemas.openxmlformats.org/drawingml/2006/main">
               <a:ext uri="{FF2B5EF4-FFF2-40B4-BE49-F238E27FC236}">
-                <a16:creationId xmlns:a16="http://schemas.microsoft.com/office/drawing/2014/main" id="{A5292E95-A5AC-427C-B264-3662D02B22FD}"/>
+                <a16:creationId xmlns:a16="http://schemas.microsoft.com/office/drawing/2014/main" id="{E464E3C3-00D1-43DF-9D90-C16F8E32E123}"/>
               </a:ext>
             </a:extLst>
           </p:cNvPr>
@@ -4640,19 +4640,19 @@
           <p:cNvPr id="29" name="">
             <a:extLst xmlns:a="http://schemas.openxmlformats.org/drawingml/2006/main">
               <a:ext uri="{FF2B5EF4-FFF2-40B4-BE49-F238E27FC236}">
-                <a16:creationId xmlns:a16="http://schemas.microsoft.com/office/drawing/2014/main" id="{7B69870E-1A7E-4F7B-BB9D-EC369D55AD65}"/>
-              </a:ext>
-            </a:extLst>
-          </p:cNvPr>
-          <p:cNvSpPr>
-            <a:spLocks xmlns:a="http://schemas.openxmlformats.org/drawingml/2006/main" noGrp="1"/>
-          </p:cNvSpPr>
-          <p:nvPr/>
-        </p:nvSpPr>
-        <p:spPr>
-          <a:xfrm xmlns:a="http://schemas.openxmlformats.org/drawingml/2006/main">
-            <a:off x="514350" y="6400800"/>
-            <a:ext cx="8572500" cy="171450"/>
+                <a16:creationId xmlns:a16="http://schemas.microsoft.com/office/drawing/2014/main" id="{8A68184C-11B0-4D83-A7AB-DDD31FC63065}"/>
+              </a:ext>
+            </a:extLst>
+          </p:cNvPr>
+          <p:cNvSpPr>
+            <a:spLocks xmlns:a="http://schemas.openxmlformats.org/drawingml/2006/main" noGrp="1"/>
+          </p:cNvSpPr>
+          <p:nvPr/>
+        </p:nvSpPr>
+        <p:spPr>
+          <a:xfrm xmlns:a="http://schemas.openxmlformats.org/drawingml/2006/main">
+            <a:off x="514350" y="6381750"/>
+            <a:ext cx="8763000" cy="190500"/>
           </a:xfrm>
           <a:prstGeom xmlns:a="http://schemas.openxmlformats.org/drawingml/2006/main" prst="rect">
             <a:avLst/>
@@ -4678,14 +4678,14 @@
           <a:lstStyle xmlns:a="http://schemas.openxmlformats.org/drawingml/2006/main"/>
           <a:p xmlns:a="http://schemas.openxmlformats.org/drawingml/2006/main">
             <a:pPr algn="l">
-              <a:defRPr sz="713" b="0">
+              <a:defRPr sz="825" b="0">
                 <a:solidFill>
                   <a:srgbClr val="475569"/>
                 </a:solidFill>
               </a:defRPr>
             </a:pPr>
             <a:r>
-              <a:rPr sz="713" b="0">
+              <a:rPr sz="825" b="0">
                 <a:solidFill>
                   <a:srgbClr val="475569"/>
                 </a:solidFill>
@@ -4700,19 +4700,19 @@
           <p:cNvPr id="30" name="">
             <a:extLst xmlns:a="http://schemas.openxmlformats.org/drawingml/2006/main">
               <a:ext uri="{FF2B5EF4-FFF2-40B4-BE49-F238E27FC236}">
-                <a16:creationId xmlns:a16="http://schemas.microsoft.com/office/drawing/2014/main" id="{7A8D2434-0D5C-421A-BBA7-3A524BADD9A6}"/>
-              </a:ext>
-            </a:extLst>
-          </p:cNvPr>
-          <p:cNvSpPr>
-            <a:spLocks xmlns:a="http://schemas.openxmlformats.org/drawingml/2006/main" noGrp="1"/>
-          </p:cNvSpPr>
-          <p:nvPr/>
-        </p:nvSpPr>
-        <p:spPr>
-          <a:xfrm xmlns:a="http://schemas.openxmlformats.org/drawingml/2006/main">
-            <a:off x="11049000" y="6400800"/>
-            <a:ext cx="628650" cy="171450"/>
+                <a16:creationId xmlns:a16="http://schemas.microsoft.com/office/drawing/2014/main" id="{96DDB103-6FCE-4EE1-9018-37258BAB125C}"/>
+              </a:ext>
+            </a:extLst>
+          </p:cNvPr>
+          <p:cNvSpPr>
+            <a:spLocks xmlns:a="http://schemas.openxmlformats.org/drawingml/2006/main" noGrp="1"/>
+          </p:cNvSpPr>
+          <p:nvPr/>
+        </p:nvSpPr>
+        <p:spPr>
+          <a:xfrm xmlns:a="http://schemas.openxmlformats.org/drawingml/2006/main">
+            <a:off x="11049000" y="6381750"/>
+            <a:ext cx="628650" cy="190500"/>
           </a:xfrm>
           <a:prstGeom xmlns:a="http://schemas.openxmlformats.org/drawingml/2006/main" prst="rect">
             <a:avLst/>
@@ -4738,14 +4738,14 @@
           <a:lstStyle xmlns:a="http://schemas.openxmlformats.org/drawingml/2006/main"/>
           <a:p xmlns:a="http://schemas.openxmlformats.org/drawingml/2006/main">
             <a:pPr algn="r">
-              <a:defRPr sz="750" b="0">
+              <a:defRPr sz="825" b="0">
                 <a:solidFill>
                   <a:srgbClr val="475569"/>
                 </a:solidFill>
               </a:defRPr>
             </a:pPr>
             <a:r>
-              <a:rPr sz="750" b="0">
+              <a:rPr sz="825" b="0">
                 <a:solidFill>
                   <a:srgbClr val="475569"/>
                 </a:solidFill>
@@ -4758,7 +4758,7 @@
     </p:spTree>
     <p:extLst>
       <p:ext uri="{BB962C8B-B14F-4D97-AF65-F5344CB8AC3E}">
-        <p14:creationId xmlns:p14="http://schemas.microsoft.com/office/powerpoint/2010/main" val="423895730"/>
+        <p14:creationId xmlns:p14="http://schemas.microsoft.com/office/powerpoint/2010/main" val="925928737"/>
       </p:ext>
     </p:extLst>
   </p:cSld>
@@ -4789,7 +4789,7 @@
           <p:cNvPr id="1" name="Slide Number Placeholder 5">
             <a:extLst xmlns:a="http://schemas.openxmlformats.org/drawingml/2006/main">
               <a:ext uri="{FF2B5EF4-FFF2-40B4-BE49-F238E27FC236}">
-                <a16:creationId xmlns:a16="http://schemas.microsoft.com/office/drawing/2014/main" id="{07657F96-14BB-4F34-A3C2-E58CAF19D6CA}"/>
+                <a16:creationId xmlns:a16="http://schemas.microsoft.com/office/drawing/2014/main" id="{439AD580-5634-40B8-ADF2-F75BA71FC2A9}"/>
               </a:ext>
             </a:extLst>
           </p:cNvPr>
@@ -4821,7 +4821,7 @@
           <p:cNvPr id="2" name="">
             <a:extLst xmlns:a="http://schemas.openxmlformats.org/drawingml/2006/main">
               <a:ext uri="{FF2B5EF4-FFF2-40B4-BE49-F238E27FC236}">
-                <a16:creationId xmlns:a16="http://schemas.microsoft.com/office/drawing/2014/main" id="{5F1E7CB2-E270-4FE5-A708-EF27FCDAD4B0}"/>
+                <a16:creationId xmlns:a16="http://schemas.microsoft.com/office/drawing/2014/main" id="{4EBDE0AB-4D63-411F-9FB1-B99F916927B0}"/>
               </a:ext>
             </a:extLst>
           </p:cNvPr>
@@ -4854,7 +4854,7 @@
           <p:cNvPr id="3" name="">
             <a:extLst xmlns:a="http://schemas.openxmlformats.org/drawingml/2006/main">
               <a:ext uri="{FF2B5EF4-FFF2-40B4-BE49-F238E27FC236}">
-                <a16:creationId xmlns:a16="http://schemas.microsoft.com/office/drawing/2014/main" id="{71E73812-87BF-46EF-9120-89614287A6F7}"/>
+                <a16:creationId xmlns:a16="http://schemas.microsoft.com/office/drawing/2014/main" id="{468F8C49-EBF8-466E-95BD-ED93ADADE407}"/>
               </a:ext>
             </a:extLst>
           </p:cNvPr>
@@ -4887,7 +4887,7 @@
           <p:cNvPr id="4" name="">
             <a:extLst xmlns:a="http://schemas.openxmlformats.org/drawingml/2006/main">
               <a:ext uri="{FF2B5EF4-FFF2-40B4-BE49-F238E27FC236}">
-                <a16:creationId xmlns:a16="http://schemas.microsoft.com/office/drawing/2014/main" id="{98C32A0D-DDE9-4084-B554-925A25C2E5B1}"/>
+                <a16:creationId xmlns:a16="http://schemas.microsoft.com/office/drawing/2014/main" id="{C740EF9F-8A84-477B-9C08-3E46F537D270}"/>
               </a:ext>
             </a:extLst>
           </p:cNvPr>
@@ -4947,7 +4947,7 @@
           <p:cNvPr id="5" name="">
             <a:extLst xmlns:a="http://schemas.openxmlformats.org/drawingml/2006/main">
               <a:ext uri="{FF2B5EF4-FFF2-40B4-BE49-F238E27FC236}">
-                <a16:creationId xmlns:a16="http://schemas.microsoft.com/office/drawing/2014/main" id="{10A54D7C-3C40-4838-86EB-9D2946882F56}"/>
+                <a16:creationId xmlns:a16="http://schemas.microsoft.com/office/drawing/2014/main" id="{C1591E2B-2A6E-4128-857A-41EB1C5C5B9B}"/>
               </a:ext>
             </a:extLst>
           </p:cNvPr>
@@ -5007,7 +5007,7 @@
           <p:cNvPr id="6" name="">
             <a:extLst xmlns:a="http://schemas.openxmlformats.org/drawingml/2006/main">
               <a:ext uri="{FF2B5EF4-FFF2-40B4-BE49-F238E27FC236}">
-                <a16:creationId xmlns:a16="http://schemas.microsoft.com/office/drawing/2014/main" id="{C3AD2A46-1FCE-41A1-8A49-73B2B8EFAB54}"/>
+                <a16:creationId xmlns:a16="http://schemas.microsoft.com/office/drawing/2014/main" id="{B329A36A-5B4A-44A8-AE24-728C71D9D8C9}"/>
               </a:ext>
             </a:extLst>
           </p:cNvPr>
@@ -5042,7 +5042,7 @@
           <p:cNvPr id="7" name="">
             <a:extLst xmlns:a="http://schemas.openxmlformats.org/drawingml/2006/main">
               <a:ext uri="{FF2B5EF4-FFF2-40B4-BE49-F238E27FC236}">
-                <a16:creationId xmlns:a16="http://schemas.microsoft.com/office/drawing/2014/main" id="{3A4F308E-299D-405A-BBC6-C8990E1DA748}"/>
+                <a16:creationId xmlns:a16="http://schemas.microsoft.com/office/drawing/2014/main" id="{B3D3A2F0-62CD-4AB7-9199-7A0C2E020C0E}"/>
               </a:ext>
             </a:extLst>
           </p:cNvPr>
@@ -5102,7 +5102,7 @@
           <p:cNvPr id="8" name="">
             <a:extLst xmlns:a="http://schemas.openxmlformats.org/drawingml/2006/main">
               <a:ext uri="{FF2B5EF4-FFF2-40B4-BE49-F238E27FC236}">
-                <a16:creationId xmlns:a16="http://schemas.microsoft.com/office/drawing/2014/main" id="{5C944750-43A5-435D-8060-D89C3E09BC05}"/>
+                <a16:creationId xmlns:a16="http://schemas.microsoft.com/office/drawing/2014/main" id="{D455C0D3-EBB5-468A-AF60-D9BB2381BD12}"/>
               </a:ext>
             </a:extLst>
           </p:cNvPr>
@@ -5179,7 +5179,7 @@
           <p:cNvPr id="9" name="">
             <a:extLst xmlns:a="http://schemas.openxmlformats.org/drawingml/2006/main">
               <a:ext uri="{FF2B5EF4-FFF2-40B4-BE49-F238E27FC236}">
-                <a16:creationId xmlns:a16="http://schemas.microsoft.com/office/drawing/2014/main" id="{CA1B9974-17EC-490C-90A0-9246BD8F21E2}"/>
+                <a16:creationId xmlns:a16="http://schemas.microsoft.com/office/drawing/2014/main" id="{68B32030-463F-4C20-BF7B-9F7C89D5B140}"/>
               </a:ext>
             </a:extLst>
           </p:cNvPr>
@@ -5214,7 +5214,7 @@
           <p:cNvPr id="10" name="">
             <a:extLst xmlns:a="http://schemas.openxmlformats.org/drawingml/2006/main">
               <a:ext uri="{FF2B5EF4-FFF2-40B4-BE49-F238E27FC236}">
-                <a16:creationId xmlns:a16="http://schemas.microsoft.com/office/drawing/2014/main" id="{BCDEB6A5-8A15-4B1E-8B87-EE625A5CBF92}"/>
+                <a16:creationId xmlns:a16="http://schemas.microsoft.com/office/drawing/2014/main" id="{2C541FF5-CFD0-4B3E-9D6B-502CF33629CA}"/>
               </a:ext>
             </a:extLst>
           </p:cNvPr>
@@ -5247,7 +5247,7 @@
           <p:cNvPr id="11" name="">
             <a:extLst xmlns:a="http://schemas.openxmlformats.org/drawingml/2006/main">
               <a:ext uri="{FF2B5EF4-FFF2-40B4-BE49-F238E27FC236}">
-                <a16:creationId xmlns:a16="http://schemas.microsoft.com/office/drawing/2014/main" id="{13E328D3-FFE9-486F-9860-60C4BD9C46CB}"/>
+                <a16:creationId xmlns:a16="http://schemas.microsoft.com/office/drawing/2014/main" id="{EFD2926A-A609-4AB6-B06B-8553E2D4601D}"/>
               </a:ext>
             </a:extLst>
           </p:cNvPr>
@@ -5307,7 +5307,7 @@
           <p:cNvPr id="12" name="">
             <a:extLst xmlns:a="http://schemas.openxmlformats.org/drawingml/2006/main">
               <a:ext uri="{FF2B5EF4-FFF2-40B4-BE49-F238E27FC236}">
-                <a16:creationId xmlns:a16="http://schemas.microsoft.com/office/drawing/2014/main" id="{AF220268-052C-44EB-95EF-99E8E6599CCE}"/>
+                <a16:creationId xmlns:a16="http://schemas.microsoft.com/office/drawing/2014/main" id="{0962F2FC-8D27-41E0-BFA9-44F5030E3B09}"/>
               </a:ext>
             </a:extLst>
           </p:cNvPr>
@@ -5367,7 +5367,7 @@
           <p:cNvPr id="13" name="">
             <a:extLst xmlns:a="http://schemas.openxmlformats.org/drawingml/2006/main">
               <a:ext uri="{FF2B5EF4-FFF2-40B4-BE49-F238E27FC236}">
-                <a16:creationId xmlns:a16="http://schemas.microsoft.com/office/drawing/2014/main" id="{53636597-BB80-4E1B-A041-19B5392141C9}"/>
+                <a16:creationId xmlns:a16="http://schemas.microsoft.com/office/drawing/2014/main" id="{A543BBDA-6379-4F7D-BA51-D733675651E6}"/>
               </a:ext>
             </a:extLst>
           </p:cNvPr>
@@ -5402,7 +5402,7 @@
           <p:cNvPr id="14" name="">
             <a:extLst xmlns:a="http://schemas.openxmlformats.org/drawingml/2006/main">
               <a:ext uri="{FF2B5EF4-FFF2-40B4-BE49-F238E27FC236}">
-                <a16:creationId xmlns:a16="http://schemas.microsoft.com/office/drawing/2014/main" id="{3E2AFD03-89B0-4AF0-BEFC-08944A7F0AF7}"/>
+                <a16:creationId xmlns:a16="http://schemas.microsoft.com/office/drawing/2014/main" id="{81E8A05E-88A6-478C-A101-B84B3BF7E96A}"/>
               </a:ext>
             </a:extLst>
           </p:cNvPr>
@@ -5435,7 +5435,7 @@
           <p:cNvPr id="15" name="">
             <a:extLst xmlns:a="http://schemas.openxmlformats.org/drawingml/2006/main">
               <a:ext uri="{FF2B5EF4-FFF2-40B4-BE49-F238E27FC236}">
-                <a16:creationId xmlns:a16="http://schemas.microsoft.com/office/drawing/2014/main" id="{C4F51D77-7F3E-4AA6-A39E-EF95FC5387F5}"/>
+                <a16:creationId xmlns:a16="http://schemas.microsoft.com/office/drawing/2014/main" id="{E2CE378C-9F10-431C-9786-72622E8F64C2}"/>
               </a:ext>
             </a:extLst>
           </p:cNvPr>
@@ -5495,7 +5495,7 @@
           <p:cNvPr id="16" name="">
             <a:extLst xmlns:a="http://schemas.openxmlformats.org/drawingml/2006/main">
               <a:ext uri="{FF2B5EF4-FFF2-40B4-BE49-F238E27FC236}">
-                <a16:creationId xmlns:a16="http://schemas.microsoft.com/office/drawing/2014/main" id="{281438B7-4353-43BC-AE64-4654AAD4B275}"/>
+                <a16:creationId xmlns:a16="http://schemas.microsoft.com/office/drawing/2014/main" id="{875BBCC3-1D58-477F-9ABF-661A0B333F98}"/>
               </a:ext>
             </a:extLst>
           </p:cNvPr>
@@ -5555,23 +5555,23 @@
           <p:cNvPr id="17" name="">
             <a:extLst xmlns:a="http://schemas.openxmlformats.org/drawingml/2006/main">
               <a:ext uri="{FF2B5EF4-FFF2-40B4-BE49-F238E27FC236}">
-                <a16:creationId xmlns:a16="http://schemas.microsoft.com/office/drawing/2014/main" id="{44578A6F-7C0E-4FEE-B3F8-5173710EF4A5}"/>
-              </a:ext>
-            </a:extLst>
-          </p:cNvPr>
-          <p:cNvSpPr>
-            <a:spLocks xmlns:a="http://schemas.openxmlformats.org/drawingml/2006/main" noGrp="1"/>
-          </p:cNvSpPr>
-          <p:nvPr/>
-        </p:nvSpPr>
-        <p:spPr>
-          <a:xfrm xmlns:a="http://schemas.openxmlformats.org/drawingml/2006/main">
-            <a:off x="685800" y="4648200"/>
-            <a:ext cx="5048250" cy="990600"/>
+                <a16:creationId xmlns:a16="http://schemas.microsoft.com/office/drawing/2014/main" id="{29A4D8BF-32F4-4C77-A585-AEE01109BA19}"/>
+              </a:ext>
+            </a:extLst>
+          </p:cNvPr>
+          <p:cNvSpPr>
+            <a:spLocks xmlns:a="http://schemas.openxmlformats.org/drawingml/2006/main" noGrp="1"/>
+          </p:cNvSpPr>
+          <p:nvPr/>
+        </p:nvSpPr>
+        <p:spPr>
+          <a:xfrm xmlns:a="http://schemas.openxmlformats.org/drawingml/2006/main">
+            <a:off x="685800" y="4572000"/>
+            <a:ext cx="5048250" cy="1219200"/>
           </a:xfrm>
           <a:prstGeom xmlns:a="http://schemas.openxmlformats.org/drawingml/2006/main" prst="roundRect">
             <a:avLst>
-              <a:gd name="adj" fmla="val 7692"/>
+              <a:gd name="adj" fmla="val 6250"/>
             </a:avLst>
           </a:prstGeom>
           <a:solidFill xmlns:a="http://schemas.openxmlformats.org/drawingml/2006/main">
@@ -5590,19 +5590,19 @@
           <p:cNvPr id="18" name="">
             <a:extLst xmlns:a="http://schemas.openxmlformats.org/drawingml/2006/main">
               <a:ext uri="{FF2B5EF4-FFF2-40B4-BE49-F238E27FC236}">
-                <a16:creationId xmlns:a16="http://schemas.microsoft.com/office/drawing/2014/main" id="{0FA8D11B-45E3-4821-BA87-63708F548E18}"/>
-              </a:ext>
-            </a:extLst>
-          </p:cNvPr>
-          <p:cNvSpPr>
-            <a:spLocks xmlns:a="http://schemas.openxmlformats.org/drawingml/2006/main" noGrp="1"/>
-          </p:cNvSpPr>
-          <p:nvPr/>
-        </p:nvSpPr>
-        <p:spPr>
-          <a:xfrm xmlns:a="http://schemas.openxmlformats.org/drawingml/2006/main">
-            <a:off x="685800" y="4648200"/>
-            <a:ext cx="76200" cy="990600"/>
+                <a16:creationId xmlns:a16="http://schemas.microsoft.com/office/drawing/2014/main" id="{0F01B3B2-614B-490D-9970-B546ED59AE4F}"/>
+              </a:ext>
+            </a:extLst>
+          </p:cNvPr>
+          <p:cNvSpPr>
+            <a:spLocks xmlns:a="http://schemas.openxmlformats.org/drawingml/2006/main" noGrp="1"/>
+          </p:cNvSpPr>
+          <p:nvPr/>
+        </p:nvSpPr>
+        <p:spPr>
+          <a:xfrm xmlns:a="http://schemas.openxmlformats.org/drawingml/2006/main">
+            <a:off x="685800" y="4572000"/>
+            <a:ext cx="76200" cy="1219200"/>
           </a:xfrm>
           <a:prstGeom xmlns:a="http://schemas.openxmlformats.org/drawingml/2006/main" prst="rect">
             <a:avLst/>
@@ -5623,18 +5623,18 @@
           <p:cNvPr id="19" name="">
             <a:extLst xmlns:a="http://schemas.openxmlformats.org/drawingml/2006/main">
               <a:ext uri="{FF2B5EF4-FFF2-40B4-BE49-F238E27FC236}">
-                <a16:creationId xmlns:a16="http://schemas.microsoft.com/office/drawing/2014/main" id="{2BDA00E2-9277-4549-B65D-B76830DE26F0}"/>
-              </a:ext>
-            </a:extLst>
-          </p:cNvPr>
-          <p:cNvSpPr>
-            <a:spLocks xmlns:a="http://schemas.openxmlformats.org/drawingml/2006/main" noGrp="1"/>
-          </p:cNvSpPr>
-          <p:nvPr/>
-        </p:nvSpPr>
-        <p:spPr>
-          <a:xfrm xmlns:a="http://schemas.openxmlformats.org/drawingml/2006/main">
-            <a:off x="914400" y="4857750"/>
+                <a16:creationId xmlns:a16="http://schemas.microsoft.com/office/drawing/2014/main" id="{D5CEE991-463B-40C8-A1A8-1289C35671B2}"/>
+              </a:ext>
+            </a:extLst>
+          </p:cNvPr>
+          <p:cNvSpPr>
+            <a:spLocks xmlns:a="http://schemas.openxmlformats.org/drawingml/2006/main" noGrp="1"/>
+          </p:cNvSpPr>
+          <p:nvPr/>
+        </p:nvSpPr>
+        <p:spPr>
+          <a:xfrm xmlns:a="http://schemas.openxmlformats.org/drawingml/2006/main">
+            <a:off x="914400" y="4781550"/>
             <a:ext cx="4591050" cy="285750"/>
           </a:xfrm>
           <a:prstGeom xmlns:a="http://schemas.openxmlformats.org/drawingml/2006/main" prst="rect">
@@ -5683,19 +5683,19 @@
           <p:cNvPr id="20" name="">
             <a:extLst xmlns:a="http://schemas.openxmlformats.org/drawingml/2006/main">
               <a:ext uri="{FF2B5EF4-FFF2-40B4-BE49-F238E27FC236}">
-                <a16:creationId xmlns:a16="http://schemas.microsoft.com/office/drawing/2014/main" id="{099FA8E7-1579-4DA1-B03B-F47561EFA10D}"/>
-              </a:ext>
-            </a:extLst>
-          </p:cNvPr>
-          <p:cNvSpPr>
-            <a:spLocks xmlns:a="http://schemas.openxmlformats.org/drawingml/2006/main" noGrp="1"/>
-          </p:cNvSpPr>
-          <p:nvPr/>
-        </p:nvSpPr>
-        <p:spPr>
-          <a:xfrm xmlns:a="http://schemas.openxmlformats.org/drawingml/2006/main">
-            <a:off x="914400" y="5295900"/>
-            <a:ext cx="4591050" cy="152400"/>
+                <a16:creationId xmlns:a16="http://schemas.microsoft.com/office/drawing/2014/main" id="{2DCFE8B6-6193-460D-A246-85AFE3804367}"/>
+              </a:ext>
+            </a:extLst>
+          </p:cNvPr>
+          <p:cNvSpPr>
+            <a:spLocks xmlns:a="http://schemas.openxmlformats.org/drawingml/2006/main" noGrp="1"/>
+          </p:cNvSpPr>
+          <p:nvPr/>
+        </p:nvSpPr>
+        <p:spPr>
+          <a:xfrm xmlns:a="http://schemas.openxmlformats.org/drawingml/2006/main">
+            <a:off x="914400" y="5219700"/>
+            <a:ext cx="4591050" cy="381000"/>
           </a:xfrm>
           <a:prstGeom xmlns:a="http://schemas.openxmlformats.org/drawingml/2006/main" prst="rect">
             <a:avLst/>
@@ -5716,7 +5716,7 @@
         </p:spPr>
         <p:txBody>
           <a:bodyPr xmlns:a="http://schemas.openxmlformats.org/drawingml/2006/main" lIns="0" tIns="0" rIns="0" bIns="0" anchor="t">
-            <a:normAutofit fontScale="90353"/>
+            <a:normAutofit fontScale="100000"/>
           </a:bodyPr>
           <a:lstStyle xmlns:a="http://schemas.openxmlformats.org/drawingml/2006/main"/>
           <a:p xmlns:a="http://schemas.openxmlformats.org/drawingml/2006/main">
@@ -5733,7 +5733,24 @@
                   <a:srgbClr val="0F172A"/>
                 </a:solidFill>
               </a:rPr>
-              <a:t>レイアウト階層内での直接移動はできず、ダッシュボード上で直接操作する必要がある。</a:t>
+              <a:t>レイアウト階層内での直接移動はできず、</a:t>
+            </a:r>
+          </a:p>
+          <a:p xmlns:a="http://schemas.openxmlformats.org/drawingml/2006/main">
+            <a:pPr algn="l">
+              <a:defRPr sz="1088" b="0">
+                <a:solidFill>
+                  <a:srgbClr val="0F172A"/>
+                </a:solidFill>
+              </a:defRPr>
+            </a:pPr>
+            <a:r>
+              <a:rPr sz="1088" b="0">
+                <a:solidFill>
+                  <a:srgbClr val="0F172A"/>
+                </a:solidFill>
+              </a:rPr>
+              <a:t>ダッシュボード上で直接操作する必要がある。</a:t>
             </a:r>
           </a:p>
         </p:txBody>
@@ -5747,7 +5764,7 @@
           <p:nvPr/>
         </p:nvPicPr>
         <p:blipFill>
-          <a:blip xmlns:r="http://schemas.openxmlformats.org/officeDocument/2006/relationships" xmlns:a="http://schemas.openxmlformats.org/drawingml/2006/main" r:embed="Rd14fdbfe74124159"/>
+          <a:blip xmlns:r="http://schemas.openxmlformats.org/officeDocument/2006/relationships" xmlns:a="http://schemas.openxmlformats.org/drawingml/2006/main" r:embed="Rad379428cf5344f3"/>
           <a:stretch xmlns:a="http://schemas.openxmlformats.org/drawingml/2006/main"/>
         </p:blipFill>
         <p:spPr>
@@ -5769,7 +5786,7 @@
           <p:nvPr/>
         </p:nvPicPr>
         <p:blipFill>
-          <a:blip xmlns:r="http://schemas.openxmlformats.org/officeDocument/2006/relationships" xmlns:a="http://schemas.openxmlformats.org/drawingml/2006/main" r:embed="Rbd67cd622e1e4b29"/>
+          <a:blip xmlns:r="http://schemas.openxmlformats.org/officeDocument/2006/relationships" xmlns:a="http://schemas.openxmlformats.org/drawingml/2006/main" r:embed="R8be66670e9a24b54"/>
           <a:stretch xmlns:a="http://schemas.openxmlformats.org/drawingml/2006/main"/>
         </p:blipFill>
         <p:spPr>
@@ -5787,7 +5804,7 @@
           <p:cNvPr id="23" name="">
             <a:extLst xmlns:a="http://schemas.openxmlformats.org/drawingml/2006/main">
               <a:ext uri="{FF2B5EF4-FFF2-40B4-BE49-F238E27FC236}">
-                <a16:creationId xmlns:a16="http://schemas.microsoft.com/office/drawing/2014/main" id="{DCC8E305-7C04-468A-8C5E-CD38F7A8CD07}"/>
+                <a16:creationId xmlns:a16="http://schemas.microsoft.com/office/drawing/2014/main" id="{C06693E1-BEF5-427D-B3F4-8BE37C3F226A}"/>
               </a:ext>
             </a:extLst>
           </p:cNvPr>
@@ -5825,14 +5842,14 @@
           <a:lstStyle xmlns:a="http://schemas.openxmlformats.org/drawingml/2006/main"/>
           <a:p xmlns:a="http://schemas.openxmlformats.org/drawingml/2006/main">
             <a:pPr algn="l">
-              <a:defRPr sz="863" b="1">
+              <a:defRPr sz="938" b="1">
                 <a:solidFill>
                   <a:srgbClr val="2CB1BC"/>
                 </a:solidFill>
               </a:defRPr>
             </a:pPr>
             <a:r>
-              <a:rPr sz="863" b="1">
+              <a:rPr sz="938" b="1">
                 <a:solidFill>
                   <a:srgbClr val="2CB1BC"/>
                 </a:solidFill>
@@ -5847,7 +5864,7 @@
           <p:cNvPr id="24" name="">
             <a:extLst xmlns:a="http://schemas.openxmlformats.org/drawingml/2006/main">
               <a:ext uri="{FF2B5EF4-FFF2-40B4-BE49-F238E27FC236}">
-                <a16:creationId xmlns:a16="http://schemas.microsoft.com/office/drawing/2014/main" id="{F7A06ED5-1B14-4533-9BB9-62EB338CCB07}"/>
+                <a16:creationId xmlns:a16="http://schemas.microsoft.com/office/drawing/2014/main" id="{2C6EFBA4-DAA4-4D6D-BB6A-D8D507EA6A30}"/>
               </a:ext>
             </a:extLst>
           </p:cNvPr>
@@ -5885,14 +5902,14 @@
           <a:lstStyle xmlns:a="http://schemas.openxmlformats.org/drawingml/2006/main"/>
           <a:p xmlns:a="http://schemas.openxmlformats.org/drawingml/2006/main">
             <a:pPr algn="l">
-              <a:defRPr sz="863" b="1">
+              <a:defRPr sz="938" b="1">
                 <a:solidFill>
                   <a:srgbClr val="5B67D8"/>
                 </a:solidFill>
               </a:defRPr>
             </a:pPr>
             <a:r>
-              <a:rPr sz="863" b="1">
+              <a:rPr sz="938" b="1">
                 <a:solidFill>
                   <a:srgbClr val="5B67D8"/>
                 </a:solidFill>
@@ -5907,19 +5924,19 @@
           <p:cNvPr id="25" name="">
             <a:extLst xmlns:a="http://schemas.openxmlformats.org/drawingml/2006/main">
               <a:ext uri="{FF2B5EF4-FFF2-40B4-BE49-F238E27FC236}">
-                <a16:creationId xmlns:a16="http://schemas.microsoft.com/office/drawing/2014/main" id="{FCCB1C26-2604-4473-BCC1-67C1C91175A0}"/>
-              </a:ext>
-            </a:extLst>
-          </p:cNvPr>
-          <p:cNvSpPr>
-            <a:spLocks xmlns:a="http://schemas.openxmlformats.org/drawingml/2006/main" noGrp="1"/>
-          </p:cNvSpPr>
-          <p:nvPr/>
-        </p:nvSpPr>
-        <p:spPr>
-          <a:xfrm xmlns:a="http://schemas.openxmlformats.org/drawingml/2006/main">
-            <a:off x="514350" y="6400800"/>
-            <a:ext cx="8572500" cy="171450"/>
+                <a16:creationId xmlns:a16="http://schemas.microsoft.com/office/drawing/2014/main" id="{86BAB07A-923C-40EF-BB7F-BD9C1C761B39}"/>
+              </a:ext>
+            </a:extLst>
+          </p:cNvPr>
+          <p:cNvSpPr>
+            <a:spLocks xmlns:a="http://schemas.openxmlformats.org/drawingml/2006/main" noGrp="1"/>
+          </p:cNvSpPr>
+          <p:nvPr/>
+        </p:nvSpPr>
+        <p:spPr>
+          <a:xfrm xmlns:a="http://schemas.openxmlformats.org/drawingml/2006/main">
+            <a:off x="514350" y="6381750"/>
+            <a:ext cx="8763000" cy="190500"/>
           </a:xfrm>
           <a:prstGeom xmlns:a="http://schemas.openxmlformats.org/drawingml/2006/main" prst="rect">
             <a:avLst/>
@@ -5945,14 +5962,14 @@
           <a:lstStyle xmlns:a="http://schemas.openxmlformats.org/drawingml/2006/main"/>
           <a:p xmlns:a="http://schemas.openxmlformats.org/drawingml/2006/main">
             <a:pPr algn="l">
-              <a:defRPr sz="713" b="0">
+              <a:defRPr sz="825" b="0">
                 <a:solidFill>
                   <a:srgbClr val="475569"/>
                 </a:solidFill>
               </a:defRPr>
             </a:pPr>
             <a:r>
-              <a:rPr sz="713" b="0">
+              <a:rPr sz="825" b="0">
                 <a:solidFill>
                   <a:srgbClr val="475569"/>
                 </a:solidFill>
@@ -5967,19 +5984,19 @@
           <p:cNvPr id="26" name="">
             <a:extLst xmlns:a="http://schemas.openxmlformats.org/drawingml/2006/main">
               <a:ext uri="{FF2B5EF4-FFF2-40B4-BE49-F238E27FC236}">
-                <a16:creationId xmlns:a16="http://schemas.microsoft.com/office/drawing/2014/main" id="{A4BC92F1-4CD3-42F7-A837-9E78223771A1}"/>
-              </a:ext>
-            </a:extLst>
-          </p:cNvPr>
-          <p:cNvSpPr>
-            <a:spLocks xmlns:a="http://schemas.openxmlformats.org/drawingml/2006/main" noGrp="1"/>
-          </p:cNvSpPr>
-          <p:nvPr/>
-        </p:nvSpPr>
-        <p:spPr>
-          <a:xfrm xmlns:a="http://schemas.openxmlformats.org/drawingml/2006/main">
-            <a:off x="11049000" y="6400800"/>
-            <a:ext cx="628650" cy="171450"/>
+                <a16:creationId xmlns:a16="http://schemas.microsoft.com/office/drawing/2014/main" id="{3DC1089D-5B41-49C9-8400-B4FB8800AB81}"/>
+              </a:ext>
+            </a:extLst>
+          </p:cNvPr>
+          <p:cNvSpPr>
+            <a:spLocks xmlns:a="http://schemas.openxmlformats.org/drawingml/2006/main" noGrp="1"/>
+          </p:cNvSpPr>
+          <p:nvPr/>
+        </p:nvSpPr>
+        <p:spPr>
+          <a:xfrm xmlns:a="http://schemas.openxmlformats.org/drawingml/2006/main">
+            <a:off x="11049000" y="6381750"/>
+            <a:ext cx="628650" cy="190500"/>
           </a:xfrm>
           <a:prstGeom xmlns:a="http://schemas.openxmlformats.org/drawingml/2006/main" prst="rect">
             <a:avLst/>
@@ -6005,14 +6022,14 @@
           <a:lstStyle xmlns:a="http://schemas.openxmlformats.org/drawingml/2006/main"/>
           <a:p xmlns:a="http://schemas.openxmlformats.org/drawingml/2006/main">
             <a:pPr algn="r">
-              <a:defRPr sz="750" b="0">
+              <a:defRPr sz="825" b="0">
                 <a:solidFill>
                   <a:srgbClr val="475569"/>
                 </a:solidFill>
               </a:defRPr>
             </a:pPr>
             <a:r>
-              <a:rPr sz="750" b="0">
+              <a:rPr sz="825" b="0">
                 <a:solidFill>
                   <a:srgbClr val="475569"/>
                 </a:solidFill>
@@ -6025,7 +6042,7 @@
     </p:spTree>
     <p:extLst>
       <p:ext uri="{BB962C8B-B14F-4D97-AF65-F5344CB8AC3E}">
-        <p14:creationId xmlns:p14="http://schemas.microsoft.com/office/powerpoint/2010/main" val="1435681045"/>
+        <p14:creationId xmlns:p14="http://schemas.microsoft.com/office/powerpoint/2010/main" val="328321100"/>
       </p:ext>
     </p:extLst>
   </p:cSld>
@@ -6056,7 +6073,7 @@
           <p:cNvPr id="1" name="Slide Number Placeholder 5">
             <a:extLst xmlns:a="http://schemas.openxmlformats.org/drawingml/2006/main">
               <a:ext uri="{FF2B5EF4-FFF2-40B4-BE49-F238E27FC236}">
-                <a16:creationId xmlns:a16="http://schemas.microsoft.com/office/drawing/2014/main" id="{07657F96-14BB-4F34-A3C2-E58CAF19D6CA}"/>
+                <a16:creationId xmlns:a16="http://schemas.microsoft.com/office/drawing/2014/main" id="{439AD580-5634-40B8-ADF2-F75BA71FC2A9}"/>
               </a:ext>
             </a:extLst>
           </p:cNvPr>
@@ -6088,7 +6105,7 @@
           <p:cNvPr id="2" name="">
             <a:extLst xmlns:a="http://schemas.openxmlformats.org/drawingml/2006/main">
               <a:ext uri="{FF2B5EF4-FFF2-40B4-BE49-F238E27FC236}">
-                <a16:creationId xmlns:a16="http://schemas.microsoft.com/office/drawing/2014/main" id="{FB72F275-7375-4791-8C1C-931F8946C525}"/>
+                <a16:creationId xmlns:a16="http://schemas.microsoft.com/office/drawing/2014/main" id="{445CC5D9-66CA-4929-9275-75E4ED33D130}"/>
               </a:ext>
             </a:extLst>
           </p:cNvPr>
@@ -6121,7 +6138,7 @@
           <p:cNvPr id="3" name="">
             <a:extLst xmlns:a="http://schemas.openxmlformats.org/drawingml/2006/main">
               <a:ext uri="{FF2B5EF4-FFF2-40B4-BE49-F238E27FC236}">
-                <a16:creationId xmlns:a16="http://schemas.microsoft.com/office/drawing/2014/main" id="{54FAB86A-E5F1-4586-8F61-C067EE3BC89E}"/>
+                <a16:creationId xmlns:a16="http://schemas.microsoft.com/office/drawing/2014/main" id="{3EF42847-AFC7-4D68-9A08-E9A3FA08B997}"/>
               </a:ext>
             </a:extLst>
           </p:cNvPr>
@@ -6154,7 +6171,7 @@
           <p:cNvPr id="4" name="">
             <a:extLst xmlns:a="http://schemas.openxmlformats.org/drawingml/2006/main">
               <a:ext uri="{FF2B5EF4-FFF2-40B4-BE49-F238E27FC236}">
-                <a16:creationId xmlns:a16="http://schemas.microsoft.com/office/drawing/2014/main" id="{33B97D7B-2518-4DAC-AF08-B7A98794DCC1}"/>
+                <a16:creationId xmlns:a16="http://schemas.microsoft.com/office/drawing/2014/main" id="{C90EEBAD-E9DC-439C-AAC0-217CE4711781}"/>
               </a:ext>
             </a:extLst>
           </p:cNvPr>
@@ -6214,7 +6231,7 @@
           <p:cNvPr id="5" name="">
             <a:extLst xmlns:a="http://schemas.openxmlformats.org/drawingml/2006/main">
               <a:ext uri="{FF2B5EF4-FFF2-40B4-BE49-F238E27FC236}">
-                <a16:creationId xmlns:a16="http://schemas.microsoft.com/office/drawing/2014/main" id="{1FB8C568-8E86-4688-B9A0-CE2CBE2D9231}"/>
+                <a16:creationId xmlns:a16="http://schemas.microsoft.com/office/drawing/2014/main" id="{2F94B0B8-4700-4CD2-9FDB-ECE48AD149A0}"/>
               </a:ext>
             </a:extLst>
           </p:cNvPr>
@@ -6274,7 +6291,7 @@
           <p:cNvPr id="6" name="">
             <a:extLst xmlns:a="http://schemas.openxmlformats.org/drawingml/2006/main">
               <a:ext uri="{FF2B5EF4-FFF2-40B4-BE49-F238E27FC236}">
-                <a16:creationId xmlns:a16="http://schemas.microsoft.com/office/drawing/2014/main" id="{DF155FA6-76F6-45C4-B1B4-1BA31C10689C}"/>
+                <a16:creationId xmlns:a16="http://schemas.microsoft.com/office/drawing/2014/main" id="{E3215AEA-756F-4270-925F-7B2618DFF72E}"/>
               </a:ext>
             </a:extLst>
           </p:cNvPr>
@@ -6309,7 +6326,7 @@
           <p:cNvPr id="7" name="">
             <a:extLst xmlns:a="http://schemas.openxmlformats.org/drawingml/2006/main">
               <a:ext uri="{FF2B5EF4-FFF2-40B4-BE49-F238E27FC236}">
-                <a16:creationId xmlns:a16="http://schemas.microsoft.com/office/drawing/2014/main" id="{A26AC345-31D9-435B-B266-7450CB8B8466}"/>
+                <a16:creationId xmlns:a16="http://schemas.microsoft.com/office/drawing/2014/main" id="{2D78B6B9-9E40-46FE-9B84-C8879FA21428}"/>
               </a:ext>
             </a:extLst>
           </p:cNvPr>
@@ -6369,7 +6386,7 @@
           <p:cNvPr id="8" name="">
             <a:extLst xmlns:a="http://schemas.openxmlformats.org/drawingml/2006/main">
               <a:ext uri="{FF2B5EF4-FFF2-40B4-BE49-F238E27FC236}">
-                <a16:creationId xmlns:a16="http://schemas.microsoft.com/office/drawing/2014/main" id="{908A3DC0-1D49-43A0-A31E-50A4C019DEC4}"/>
+                <a16:creationId xmlns:a16="http://schemas.microsoft.com/office/drawing/2014/main" id="{3F0BEA4D-A44B-471D-B3AF-DEA9315C0188}"/>
               </a:ext>
             </a:extLst>
           </p:cNvPr>
@@ -6446,7 +6463,7 @@
           <p:cNvPr id="9" name="">
             <a:extLst xmlns:a="http://schemas.openxmlformats.org/drawingml/2006/main">
               <a:ext uri="{FF2B5EF4-FFF2-40B4-BE49-F238E27FC236}">
-                <a16:creationId xmlns:a16="http://schemas.microsoft.com/office/drawing/2014/main" id="{F144E9CD-F8C2-411B-9FCF-8E0503BE9E1D}"/>
+                <a16:creationId xmlns:a16="http://schemas.microsoft.com/office/drawing/2014/main" id="{38FD11E5-B5DF-4506-BE86-F43C4C17A7E7}"/>
               </a:ext>
             </a:extLst>
           </p:cNvPr>
@@ -6481,7 +6498,7 @@
           <p:cNvPr id="10" name="">
             <a:extLst xmlns:a="http://schemas.openxmlformats.org/drawingml/2006/main">
               <a:ext uri="{FF2B5EF4-FFF2-40B4-BE49-F238E27FC236}">
-                <a16:creationId xmlns:a16="http://schemas.microsoft.com/office/drawing/2014/main" id="{67060B4F-4312-4E0F-B779-9A3D3727D767}"/>
+                <a16:creationId xmlns:a16="http://schemas.microsoft.com/office/drawing/2014/main" id="{B215AAE1-893D-402E-9676-60F7A62C77DD}"/>
               </a:ext>
             </a:extLst>
           </p:cNvPr>
@@ -6514,7 +6531,7 @@
           <p:cNvPr id="11" name="">
             <a:extLst xmlns:a="http://schemas.openxmlformats.org/drawingml/2006/main">
               <a:ext uri="{FF2B5EF4-FFF2-40B4-BE49-F238E27FC236}">
-                <a16:creationId xmlns:a16="http://schemas.microsoft.com/office/drawing/2014/main" id="{EF3103E6-8D39-4F9D-BA2E-14E36F2D9CBE}"/>
+                <a16:creationId xmlns:a16="http://schemas.microsoft.com/office/drawing/2014/main" id="{45F21FF4-D6C6-4F17-9442-1E05687F950A}"/>
               </a:ext>
             </a:extLst>
           </p:cNvPr>
@@ -6574,7 +6591,7 @@
           <p:cNvPr id="12" name="">
             <a:extLst xmlns:a="http://schemas.openxmlformats.org/drawingml/2006/main">
               <a:ext uri="{FF2B5EF4-FFF2-40B4-BE49-F238E27FC236}">
-                <a16:creationId xmlns:a16="http://schemas.microsoft.com/office/drawing/2014/main" id="{54680C1D-78C5-433D-866A-AF488069B623}"/>
+                <a16:creationId xmlns:a16="http://schemas.microsoft.com/office/drawing/2014/main" id="{A6C390E4-5976-4467-BD35-BCD63ABBB3C1}"/>
               </a:ext>
             </a:extLst>
           </p:cNvPr>
@@ -6634,7 +6651,7 @@
           <p:cNvPr id="13" name="">
             <a:extLst xmlns:a="http://schemas.openxmlformats.org/drawingml/2006/main">
               <a:ext uri="{FF2B5EF4-FFF2-40B4-BE49-F238E27FC236}">
-                <a16:creationId xmlns:a16="http://schemas.microsoft.com/office/drawing/2014/main" id="{595D4FC8-C01B-44EA-8955-7A72E8DBB962}"/>
+                <a16:creationId xmlns:a16="http://schemas.microsoft.com/office/drawing/2014/main" id="{E93CE2EC-B2C0-4C8A-A5C7-9A38FC108EC2}"/>
               </a:ext>
             </a:extLst>
           </p:cNvPr>
@@ -6669,7 +6686,7 @@
           <p:cNvPr id="14" name="">
             <a:extLst xmlns:a="http://schemas.openxmlformats.org/drawingml/2006/main">
               <a:ext uri="{FF2B5EF4-FFF2-40B4-BE49-F238E27FC236}">
-                <a16:creationId xmlns:a16="http://schemas.microsoft.com/office/drawing/2014/main" id="{37980B96-DE27-486A-B114-A3AF5F5498E9}"/>
+                <a16:creationId xmlns:a16="http://schemas.microsoft.com/office/drawing/2014/main" id="{F17BFDDC-3719-4E6A-9212-1F1233840C15}"/>
               </a:ext>
             </a:extLst>
           </p:cNvPr>
@@ -6702,7 +6719,7 @@
           <p:cNvPr id="15" name="">
             <a:extLst xmlns:a="http://schemas.openxmlformats.org/drawingml/2006/main">
               <a:ext uri="{FF2B5EF4-FFF2-40B4-BE49-F238E27FC236}">
-                <a16:creationId xmlns:a16="http://schemas.microsoft.com/office/drawing/2014/main" id="{A10A7E9D-F913-4D5A-AAFB-23D66CAB9E54}"/>
+                <a16:creationId xmlns:a16="http://schemas.microsoft.com/office/drawing/2014/main" id="{68C20AA3-4C20-4B88-B54C-4B731FFC0361}"/>
               </a:ext>
             </a:extLst>
           </p:cNvPr>
@@ -6762,7 +6779,7 @@
           <p:cNvPr id="16" name="">
             <a:extLst xmlns:a="http://schemas.openxmlformats.org/drawingml/2006/main">
               <a:ext uri="{FF2B5EF4-FFF2-40B4-BE49-F238E27FC236}">
-                <a16:creationId xmlns:a16="http://schemas.microsoft.com/office/drawing/2014/main" id="{40003A89-14CC-47DB-8141-8E252293C63E}"/>
+                <a16:creationId xmlns:a16="http://schemas.microsoft.com/office/drawing/2014/main" id="{23E45836-3C2B-4CFB-A3AE-6320EAFFF245}"/>
               </a:ext>
             </a:extLst>
           </p:cNvPr>
@@ -6822,23 +6839,23 @@
           <p:cNvPr id="17" name="">
             <a:extLst xmlns:a="http://schemas.openxmlformats.org/drawingml/2006/main">
               <a:ext uri="{FF2B5EF4-FFF2-40B4-BE49-F238E27FC236}">
-                <a16:creationId xmlns:a16="http://schemas.microsoft.com/office/drawing/2014/main" id="{5E30CAE0-0F88-4DCE-8332-0938F3F9C0D8}"/>
-              </a:ext>
-            </a:extLst>
-          </p:cNvPr>
-          <p:cNvSpPr>
-            <a:spLocks xmlns:a="http://schemas.openxmlformats.org/drawingml/2006/main" noGrp="1"/>
-          </p:cNvSpPr>
-          <p:nvPr/>
-        </p:nvSpPr>
-        <p:spPr>
-          <a:xfrm xmlns:a="http://schemas.openxmlformats.org/drawingml/2006/main">
-            <a:off x="685800" y="4648200"/>
-            <a:ext cx="5048250" cy="990600"/>
+                <a16:creationId xmlns:a16="http://schemas.microsoft.com/office/drawing/2014/main" id="{0A6AE320-E6A1-49E0-A0C8-2F2F5F9C650B}"/>
+              </a:ext>
+            </a:extLst>
+          </p:cNvPr>
+          <p:cNvSpPr>
+            <a:spLocks xmlns:a="http://schemas.openxmlformats.org/drawingml/2006/main" noGrp="1"/>
+          </p:cNvSpPr>
+          <p:nvPr/>
+        </p:nvSpPr>
+        <p:spPr>
+          <a:xfrm xmlns:a="http://schemas.openxmlformats.org/drawingml/2006/main">
+            <a:off x="685800" y="4572000"/>
+            <a:ext cx="5048250" cy="1219200"/>
           </a:xfrm>
           <a:prstGeom xmlns:a="http://schemas.openxmlformats.org/drawingml/2006/main" prst="roundRect">
             <a:avLst>
-              <a:gd name="adj" fmla="val 7692"/>
+              <a:gd name="adj" fmla="val 6250"/>
             </a:avLst>
           </a:prstGeom>
           <a:solidFill xmlns:a="http://schemas.openxmlformats.org/drawingml/2006/main">
@@ -6857,19 +6874,19 @@
           <p:cNvPr id="18" name="">
             <a:extLst xmlns:a="http://schemas.openxmlformats.org/drawingml/2006/main">
               <a:ext uri="{FF2B5EF4-FFF2-40B4-BE49-F238E27FC236}">
-                <a16:creationId xmlns:a16="http://schemas.microsoft.com/office/drawing/2014/main" id="{89BE596E-3221-4000-81A7-25F9FECAA9DC}"/>
-              </a:ext>
-            </a:extLst>
-          </p:cNvPr>
-          <p:cNvSpPr>
-            <a:spLocks xmlns:a="http://schemas.openxmlformats.org/drawingml/2006/main" noGrp="1"/>
-          </p:cNvSpPr>
-          <p:nvPr/>
-        </p:nvSpPr>
-        <p:spPr>
-          <a:xfrm xmlns:a="http://schemas.openxmlformats.org/drawingml/2006/main">
-            <a:off x="685800" y="4648200"/>
-            <a:ext cx="76200" cy="990600"/>
+                <a16:creationId xmlns:a16="http://schemas.microsoft.com/office/drawing/2014/main" id="{0BB82C62-6B82-4CB8-983D-FDC58BF4452C}"/>
+              </a:ext>
+            </a:extLst>
+          </p:cNvPr>
+          <p:cNvSpPr>
+            <a:spLocks xmlns:a="http://schemas.openxmlformats.org/drawingml/2006/main" noGrp="1"/>
+          </p:cNvSpPr>
+          <p:nvPr/>
+        </p:nvSpPr>
+        <p:spPr>
+          <a:xfrm xmlns:a="http://schemas.openxmlformats.org/drawingml/2006/main">
+            <a:off x="685800" y="4572000"/>
+            <a:ext cx="76200" cy="1219200"/>
           </a:xfrm>
           <a:prstGeom xmlns:a="http://schemas.openxmlformats.org/drawingml/2006/main" prst="rect">
             <a:avLst/>
@@ -6890,18 +6907,18 @@
           <p:cNvPr id="19" name="">
             <a:extLst xmlns:a="http://schemas.openxmlformats.org/drawingml/2006/main">
               <a:ext uri="{FF2B5EF4-FFF2-40B4-BE49-F238E27FC236}">
-                <a16:creationId xmlns:a16="http://schemas.microsoft.com/office/drawing/2014/main" id="{6454EE70-8D24-4C65-8A86-3A904F82BBF8}"/>
-              </a:ext>
-            </a:extLst>
-          </p:cNvPr>
-          <p:cNvSpPr>
-            <a:spLocks xmlns:a="http://schemas.openxmlformats.org/drawingml/2006/main" noGrp="1"/>
-          </p:cNvSpPr>
-          <p:nvPr/>
-        </p:nvSpPr>
-        <p:spPr>
-          <a:xfrm xmlns:a="http://schemas.openxmlformats.org/drawingml/2006/main">
-            <a:off x="914400" y="4857750"/>
+                <a16:creationId xmlns:a16="http://schemas.microsoft.com/office/drawing/2014/main" id="{EDC01EE5-E58E-4559-AEC7-948799E2640C}"/>
+              </a:ext>
+            </a:extLst>
+          </p:cNvPr>
+          <p:cNvSpPr>
+            <a:spLocks xmlns:a="http://schemas.openxmlformats.org/drawingml/2006/main" noGrp="1"/>
+          </p:cNvSpPr>
+          <p:nvPr/>
+        </p:nvSpPr>
+        <p:spPr>
+          <a:xfrm xmlns:a="http://schemas.openxmlformats.org/drawingml/2006/main">
+            <a:off x="914400" y="4781550"/>
             <a:ext cx="4591050" cy="285750"/>
           </a:xfrm>
           <a:prstGeom xmlns:a="http://schemas.openxmlformats.org/drawingml/2006/main" prst="rect">
@@ -6950,19 +6967,19 @@
           <p:cNvPr id="20" name="">
             <a:extLst xmlns:a="http://schemas.openxmlformats.org/drawingml/2006/main">
               <a:ext uri="{FF2B5EF4-FFF2-40B4-BE49-F238E27FC236}">
-                <a16:creationId xmlns:a16="http://schemas.microsoft.com/office/drawing/2014/main" id="{02DCE195-0CB1-4C02-86B6-213A02FE6931}"/>
-              </a:ext>
-            </a:extLst>
-          </p:cNvPr>
-          <p:cNvSpPr>
-            <a:spLocks xmlns:a="http://schemas.openxmlformats.org/drawingml/2006/main" noGrp="1"/>
-          </p:cNvSpPr>
-          <p:nvPr/>
-        </p:nvSpPr>
-        <p:spPr>
-          <a:xfrm xmlns:a="http://schemas.openxmlformats.org/drawingml/2006/main">
-            <a:off x="914400" y="5295900"/>
-            <a:ext cx="4591050" cy="152400"/>
+                <a16:creationId xmlns:a16="http://schemas.microsoft.com/office/drawing/2014/main" id="{C4D8F713-BAED-4ED6-907E-EF85DE463DEA}"/>
+              </a:ext>
+            </a:extLst>
+          </p:cNvPr>
+          <p:cNvSpPr>
+            <a:spLocks xmlns:a="http://schemas.openxmlformats.org/drawingml/2006/main" noGrp="1"/>
+          </p:cNvSpPr>
+          <p:nvPr/>
+        </p:nvSpPr>
+        <p:spPr>
+          <a:xfrm xmlns:a="http://schemas.openxmlformats.org/drawingml/2006/main">
+            <a:off x="914400" y="5219700"/>
+            <a:ext cx="4591050" cy="381000"/>
           </a:xfrm>
           <a:prstGeom xmlns:a="http://schemas.openxmlformats.org/drawingml/2006/main" prst="rect">
             <a:avLst/>
@@ -6983,7 +7000,7 @@
         </p:spPr>
         <p:txBody>
           <a:bodyPr xmlns:a="http://schemas.openxmlformats.org/drawingml/2006/main" lIns="0" tIns="0" rIns="0" bIns="0" anchor="t">
-            <a:normAutofit fontScale="90353"/>
+            <a:normAutofit fontScale="100000"/>
           </a:bodyPr>
           <a:lstStyle xmlns:a="http://schemas.openxmlformats.org/drawingml/2006/main"/>
           <a:p xmlns:a="http://schemas.openxmlformats.org/drawingml/2006/main">
@@ -7000,7 +7017,24 @@
                   <a:srgbClr val="0F172A"/>
                 </a:solidFill>
               </a:rPr>
-              <a:t>閲覧・軽微な編集はCloudで足りるが、見栄えまで作り込む場合はDesktopが有利。</a:t>
+              <a:t>閲覧・軽微な編集はCloudで足りるが、</a:t>
+            </a:r>
+          </a:p>
+          <a:p xmlns:a="http://schemas.openxmlformats.org/drawingml/2006/main">
+            <a:pPr algn="l">
+              <a:defRPr sz="1088" b="0">
+                <a:solidFill>
+                  <a:srgbClr val="0F172A"/>
+                </a:solidFill>
+              </a:defRPr>
+            </a:pPr>
+            <a:r>
+              <a:rPr sz="1088" b="0">
+                <a:solidFill>
+                  <a:srgbClr val="0F172A"/>
+                </a:solidFill>
+              </a:rPr>
+              <a:t>見栄えまで作り込む場合はDesktopが有利。</a:t>
             </a:r>
           </a:p>
         </p:txBody>
@@ -7014,7 +7048,7 @@
           <p:nvPr/>
         </p:nvPicPr>
         <p:blipFill>
-          <a:blip xmlns:r="http://schemas.openxmlformats.org/officeDocument/2006/relationships" xmlns:a="http://schemas.openxmlformats.org/drawingml/2006/main" r:embed="R791fff54965949bf"/>
+          <a:blip xmlns:r="http://schemas.openxmlformats.org/officeDocument/2006/relationships" xmlns:a="http://schemas.openxmlformats.org/drawingml/2006/main" r:embed="R28aa9268f70445e0"/>
           <a:stretch xmlns:a="http://schemas.openxmlformats.org/drawingml/2006/main"/>
         </p:blipFill>
         <p:spPr>
@@ -7036,7 +7070,7 @@
           <p:nvPr/>
         </p:nvPicPr>
         <p:blipFill>
-          <a:blip xmlns:r="http://schemas.openxmlformats.org/officeDocument/2006/relationships" xmlns:a="http://schemas.openxmlformats.org/drawingml/2006/main" r:embed="R3ee283020d6a4d2e"/>
+          <a:blip xmlns:r="http://schemas.openxmlformats.org/officeDocument/2006/relationships" xmlns:a="http://schemas.openxmlformats.org/drawingml/2006/main" r:embed="Rf1c33e764f384c49"/>
           <a:stretch xmlns:a="http://schemas.openxmlformats.org/drawingml/2006/main"/>
         </p:blipFill>
         <p:spPr>
@@ -7054,7 +7088,7 @@
           <p:cNvPr id="23" name="">
             <a:extLst xmlns:a="http://schemas.openxmlformats.org/drawingml/2006/main">
               <a:ext uri="{FF2B5EF4-FFF2-40B4-BE49-F238E27FC236}">
-                <a16:creationId xmlns:a16="http://schemas.microsoft.com/office/drawing/2014/main" id="{8C376D2D-6B97-4C77-8A61-A990E3C8045D}"/>
+                <a16:creationId xmlns:a16="http://schemas.microsoft.com/office/drawing/2014/main" id="{B1A57EB3-EFCB-4AB3-809A-6318AEFFD2C6}"/>
               </a:ext>
             </a:extLst>
           </p:cNvPr>
@@ -7092,14 +7126,14 @@
           <a:lstStyle xmlns:a="http://schemas.openxmlformats.org/drawingml/2006/main"/>
           <a:p xmlns:a="http://schemas.openxmlformats.org/drawingml/2006/main">
             <a:pPr algn="l">
-              <a:defRPr sz="863" b="1">
+              <a:defRPr sz="938" b="1">
                 <a:solidFill>
                   <a:srgbClr val="5B67D8"/>
                 </a:solidFill>
               </a:defRPr>
             </a:pPr>
             <a:r>
-              <a:rPr sz="863" b="1">
+              <a:rPr sz="938" b="1">
                 <a:solidFill>
                   <a:srgbClr val="5B67D8"/>
                 </a:solidFill>
@@ -7114,7 +7148,7 @@
           <p:cNvPr id="24" name="">
             <a:extLst xmlns:a="http://schemas.openxmlformats.org/drawingml/2006/main">
               <a:ext uri="{FF2B5EF4-FFF2-40B4-BE49-F238E27FC236}">
-                <a16:creationId xmlns:a16="http://schemas.microsoft.com/office/drawing/2014/main" id="{6F79F774-9E33-40BE-9C18-089675E0C69E}"/>
+                <a16:creationId xmlns:a16="http://schemas.microsoft.com/office/drawing/2014/main" id="{773E3C88-E5F0-4F54-A950-BC688213C0C0}"/>
               </a:ext>
             </a:extLst>
           </p:cNvPr>
@@ -7152,14 +7186,14 @@
           <a:lstStyle xmlns:a="http://schemas.openxmlformats.org/drawingml/2006/main"/>
           <a:p xmlns:a="http://schemas.openxmlformats.org/drawingml/2006/main">
             <a:pPr algn="l">
-              <a:defRPr sz="863" b="1">
+              <a:defRPr sz="938" b="1">
                 <a:solidFill>
                   <a:srgbClr val="2CB1BC"/>
                 </a:solidFill>
               </a:defRPr>
             </a:pPr>
             <a:r>
-              <a:rPr sz="863" b="1">
+              <a:rPr sz="938" b="1">
                 <a:solidFill>
                   <a:srgbClr val="2CB1BC"/>
                 </a:solidFill>
@@ -7174,19 +7208,19 @@
           <p:cNvPr id="25" name="">
             <a:extLst xmlns:a="http://schemas.openxmlformats.org/drawingml/2006/main">
               <a:ext uri="{FF2B5EF4-FFF2-40B4-BE49-F238E27FC236}">
-                <a16:creationId xmlns:a16="http://schemas.microsoft.com/office/drawing/2014/main" id="{246FD549-C50B-4801-BC38-28E2F152F4B5}"/>
-              </a:ext>
-            </a:extLst>
-          </p:cNvPr>
-          <p:cNvSpPr>
-            <a:spLocks xmlns:a="http://schemas.openxmlformats.org/drawingml/2006/main" noGrp="1"/>
-          </p:cNvSpPr>
-          <p:nvPr/>
-        </p:nvSpPr>
-        <p:spPr>
-          <a:xfrm xmlns:a="http://schemas.openxmlformats.org/drawingml/2006/main">
-            <a:off x="514350" y="6400800"/>
-            <a:ext cx="8572500" cy="171450"/>
+                <a16:creationId xmlns:a16="http://schemas.microsoft.com/office/drawing/2014/main" id="{236C44F5-CF97-4A9E-B982-A6B7183E37F3}"/>
+              </a:ext>
+            </a:extLst>
+          </p:cNvPr>
+          <p:cNvSpPr>
+            <a:spLocks xmlns:a="http://schemas.openxmlformats.org/drawingml/2006/main" noGrp="1"/>
+          </p:cNvSpPr>
+          <p:nvPr/>
+        </p:nvSpPr>
+        <p:spPr>
+          <a:xfrm xmlns:a="http://schemas.openxmlformats.org/drawingml/2006/main">
+            <a:off x="514350" y="6381750"/>
+            <a:ext cx="8763000" cy="190500"/>
           </a:xfrm>
           <a:prstGeom xmlns:a="http://schemas.openxmlformats.org/drawingml/2006/main" prst="rect">
             <a:avLst/>
@@ -7212,14 +7246,14 @@
           <a:lstStyle xmlns:a="http://schemas.openxmlformats.org/drawingml/2006/main"/>
           <a:p xmlns:a="http://schemas.openxmlformats.org/drawingml/2006/main">
             <a:pPr algn="l">
-              <a:defRPr sz="713" b="0">
+              <a:defRPr sz="825" b="0">
                 <a:solidFill>
                   <a:srgbClr val="475569"/>
                 </a:solidFill>
               </a:defRPr>
             </a:pPr>
             <a:r>
-              <a:rPr sz="713" b="0">
+              <a:rPr sz="825" b="0">
                 <a:solidFill>
                   <a:srgbClr val="475569"/>
                 </a:solidFill>
@@ -7234,19 +7268,19 @@
           <p:cNvPr id="26" name="">
             <a:extLst xmlns:a="http://schemas.openxmlformats.org/drawingml/2006/main">
               <a:ext uri="{FF2B5EF4-FFF2-40B4-BE49-F238E27FC236}">
-                <a16:creationId xmlns:a16="http://schemas.microsoft.com/office/drawing/2014/main" id="{E9903FA9-1700-4761-83AD-8285ACB9CB06}"/>
-              </a:ext>
-            </a:extLst>
-          </p:cNvPr>
-          <p:cNvSpPr>
-            <a:spLocks xmlns:a="http://schemas.openxmlformats.org/drawingml/2006/main" noGrp="1"/>
-          </p:cNvSpPr>
-          <p:nvPr/>
-        </p:nvSpPr>
-        <p:spPr>
-          <a:xfrm xmlns:a="http://schemas.openxmlformats.org/drawingml/2006/main">
-            <a:off x="11049000" y="6400800"/>
-            <a:ext cx="628650" cy="171450"/>
+                <a16:creationId xmlns:a16="http://schemas.microsoft.com/office/drawing/2014/main" id="{C167BB0C-CCDC-48E1-AF84-D120F493A6F0}"/>
+              </a:ext>
+            </a:extLst>
+          </p:cNvPr>
+          <p:cNvSpPr>
+            <a:spLocks xmlns:a="http://schemas.openxmlformats.org/drawingml/2006/main" noGrp="1"/>
+          </p:cNvSpPr>
+          <p:nvPr/>
+        </p:nvSpPr>
+        <p:spPr>
+          <a:xfrm xmlns:a="http://schemas.openxmlformats.org/drawingml/2006/main">
+            <a:off x="11049000" y="6381750"/>
+            <a:ext cx="628650" cy="190500"/>
           </a:xfrm>
           <a:prstGeom xmlns:a="http://schemas.openxmlformats.org/drawingml/2006/main" prst="rect">
             <a:avLst/>
@@ -7272,14 +7306,14 @@
           <a:lstStyle xmlns:a="http://schemas.openxmlformats.org/drawingml/2006/main"/>
           <a:p xmlns:a="http://schemas.openxmlformats.org/drawingml/2006/main">
             <a:pPr algn="r">
-              <a:defRPr sz="750" b="0">
+              <a:defRPr sz="825" b="0">
                 <a:solidFill>
                   <a:srgbClr val="475569"/>
                 </a:solidFill>
               </a:defRPr>
             </a:pPr>
             <a:r>
-              <a:rPr sz="750" b="0">
+              <a:rPr sz="825" b="0">
                 <a:solidFill>
                   <a:srgbClr val="475569"/>
                 </a:solidFill>
@@ -7292,7 +7326,7 @@
     </p:spTree>
     <p:extLst>
       <p:ext uri="{BB962C8B-B14F-4D97-AF65-F5344CB8AC3E}">
-        <p14:creationId xmlns:p14="http://schemas.microsoft.com/office/powerpoint/2010/main" val="1442084401"/>
+        <p14:creationId xmlns:p14="http://schemas.microsoft.com/office/powerpoint/2010/main" val="1264757726"/>
       </p:ext>
     </p:extLst>
   </p:cSld>
@@ -7323,7 +7357,7 @@
           <p:cNvPr id="1" name="Slide Number Placeholder 5">
             <a:extLst xmlns:a="http://schemas.openxmlformats.org/drawingml/2006/main">
               <a:ext uri="{FF2B5EF4-FFF2-40B4-BE49-F238E27FC236}">
-                <a16:creationId xmlns:a16="http://schemas.microsoft.com/office/drawing/2014/main" id="{07657F96-14BB-4F34-A3C2-E58CAF19D6CA}"/>
+                <a16:creationId xmlns:a16="http://schemas.microsoft.com/office/drawing/2014/main" id="{439AD580-5634-40B8-ADF2-F75BA71FC2A9}"/>
               </a:ext>
             </a:extLst>
           </p:cNvPr>
@@ -7355,7 +7389,7 @@
           <p:cNvPr id="2" name="">
             <a:extLst xmlns:a="http://schemas.openxmlformats.org/drawingml/2006/main">
               <a:ext uri="{FF2B5EF4-FFF2-40B4-BE49-F238E27FC236}">
-                <a16:creationId xmlns:a16="http://schemas.microsoft.com/office/drawing/2014/main" id="{EC41F400-9BC7-4AA1-B66F-012933E4AB57}"/>
+                <a16:creationId xmlns:a16="http://schemas.microsoft.com/office/drawing/2014/main" id="{9C6AF4E7-1E90-495A-A269-9322B426D4FE}"/>
               </a:ext>
             </a:extLst>
           </p:cNvPr>
@@ -7388,7 +7422,7 @@
           <p:cNvPr id="3" name="">
             <a:extLst xmlns:a="http://schemas.openxmlformats.org/drawingml/2006/main">
               <a:ext uri="{FF2B5EF4-FFF2-40B4-BE49-F238E27FC236}">
-                <a16:creationId xmlns:a16="http://schemas.microsoft.com/office/drawing/2014/main" id="{17B15B02-9241-4F3B-9EAC-001D17B3CF1A}"/>
+                <a16:creationId xmlns:a16="http://schemas.microsoft.com/office/drawing/2014/main" id="{E0CC581A-7747-4E2A-9CD8-68A532F81468}"/>
               </a:ext>
             </a:extLst>
           </p:cNvPr>
@@ -7421,7 +7455,7 @@
           <p:cNvPr id="4" name="">
             <a:extLst xmlns:a="http://schemas.openxmlformats.org/drawingml/2006/main">
               <a:ext uri="{FF2B5EF4-FFF2-40B4-BE49-F238E27FC236}">
-                <a16:creationId xmlns:a16="http://schemas.microsoft.com/office/drawing/2014/main" id="{C3E0DA28-E4EF-4959-8F57-0ECEEB461466}"/>
+                <a16:creationId xmlns:a16="http://schemas.microsoft.com/office/drawing/2014/main" id="{6DB3DEE4-FDD7-4D1F-A8AE-164D844ED906}"/>
               </a:ext>
             </a:extLst>
           </p:cNvPr>
@@ -7481,7 +7515,7 @@
           <p:cNvPr id="5" name="">
             <a:extLst xmlns:a="http://schemas.openxmlformats.org/drawingml/2006/main">
               <a:ext uri="{FF2B5EF4-FFF2-40B4-BE49-F238E27FC236}">
-                <a16:creationId xmlns:a16="http://schemas.microsoft.com/office/drawing/2014/main" id="{61960995-CB67-4B18-9990-CDE841D5EDFF}"/>
+                <a16:creationId xmlns:a16="http://schemas.microsoft.com/office/drawing/2014/main" id="{2B6A93FC-F8FB-4062-93FF-CC4B7BD5A9D0}"/>
               </a:ext>
             </a:extLst>
           </p:cNvPr>
@@ -7541,7 +7575,7 @@
           <p:cNvPr id="6" name="">
             <a:extLst xmlns:a="http://schemas.openxmlformats.org/drawingml/2006/main">
               <a:ext uri="{FF2B5EF4-FFF2-40B4-BE49-F238E27FC236}">
-                <a16:creationId xmlns:a16="http://schemas.microsoft.com/office/drawing/2014/main" id="{BC5348DF-8563-42F0-BECC-37AA92C3D4FD}"/>
+                <a16:creationId xmlns:a16="http://schemas.microsoft.com/office/drawing/2014/main" id="{F6A26667-1A09-4166-A41B-CD6A08C37309}"/>
               </a:ext>
             </a:extLst>
           </p:cNvPr>
@@ -7576,7 +7610,7 @@
           <p:cNvPr id="7" name="">
             <a:extLst xmlns:a="http://schemas.openxmlformats.org/drawingml/2006/main">
               <a:ext uri="{FF2B5EF4-FFF2-40B4-BE49-F238E27FC236}">
-                <a16:creationId xmlns:a16="http://schemas.microsoft.com/office/drawing/2014/main" id="{6048124B-9D39-49F8-A0F1-BB86658E7D7B}"/>
+                <a16:creationId xmlns:a16="http://schemas.microsoft.com/office/drawing/2014/main" id="{62D9BA5F-A258-4C45-BDB5-337DEED95F0D}"/>
               </a:ext>
             </a:extLst>
           </p:cNvPr>
@@ -7636,7 +7670,7 @@
           <p:cNvPr id="8" name="">
             <a:extLst xmlns:a="http://schemas.openxmlformats.org/drawingml/2006/main">
               <a:ext uri="{FF2B5EF4-FFF2-40B4-BE49-F238E27FC236}">
-                <a16:creationId xmlns:a16="http://schemas.microsoft.com/office/drawing/2014/main" id="{F140BDC6-476B-4A02-9F39-5AF5B63AE73E}"/>
+                <a16:creationId xmlns:a16="http://schemas.microsoft.com/office/drawing/2014/main" id="{3281AD92-2CF5-49FC-9428-F753A972744B}"/>
               </a:ext>
             </a:extLst>
           </p:cNvPr>
@@ -7713,7 +7747,7 @@
           <p:cNvPr id="9" name="">
             <a:extLst xmlns:a="http://schemas.openxmlformats.org/drawingml/2006/main">
               <a:ext uri="{FF2B5EF4-FFF2-40B4-BE49-F238E27FC236}">
-                <a16:creationId xmlns:a16="http://schemas.microsoft.com/office/drawing/2014/main" id="{7188CB73-64B6-4E18-A193-81AF0D4557B5}"/>
+                <a16:creationId xmlns:a16="http://schemas.microsoft.com/office/drawing/2014/main" id="{63726A82-AD3F-4894-8224-97EFCEFA3FE1}"/>
               </a:ext>
             </a:extLst>
           </p:cNvPr>
@@ -7748,7 +7782,7 @@
           <p:cNvPr id="10" name="">
             <a:extLst xmlns:a="http://schemas.openxmlformats.org/drawingml/2006/main">
               <a:ext uri="{FF2B5EF4-FFF2-40B4-BE49-F238E27FC236}">
-                <a16:creationId xmlns:a16="http://schemas.microsoft.com/office/drawing/2014/main" id="{39CE9AB2-9024-4AE8-B5C8-C919F4EA37D5}"/>
+                <a16:creationId xmlns:a16="http://schemas.microsoft.com/office/drawing/2014/main" id="{56700101-96D2-4D6F-8655-30031B5CFF72}"/>
               </a:ext>
             </a:extLst>
           </p:cNvPr>
@@ -7781,7 +7815,7 @@
           <p:cNvPr id="11" name="">
             <a:extLst xmlns:a="http://schemas.openxmlformats.org/drawingml/2006/main">
               <a:ext uri="{FF2B5EF4-FFF2-40B4-BE49-F238E27FC236}">
-                <a16:creationId xmlns:a16="http://schemas.microsoft.com/office/drawing/2014/main" id="{67E6F469-5851-4141-BB26-9808BC2807DC}"/>
+                <a16:creationId xmlns:a16="http://schemas.microsoft.com/office/drawing/2014/main" id="{456C1882-99D9-4816-93FC-374D31379BD9}"/>
               </a:ext>
             </a:extLst>
           </p:cNvPr>
@@ -7841,7 +7875,7 @@
           <p:cNvPr id="12" name="">
             <a:extLst xmlns:a="http://schemas.openxmlformats.org/drawingml/2006/main">
               <a:ext uri="{FF2B5EF4-FFF2-40B4-BE49-F238E27FC236}">
-                <a16:creationId xmlns:a16="http://schemas.microsoft.com/office/drawing/2014/main" id="{86EED8A2-C564-4E62-A8AA-DE95A7E8EC8D}"/>
+                <a16:creationId xmlns:a16="http://schemas.microsoft.com/office/drawing/2014/main" id="{BE1F6920-6E7D-4AF8-95FF-96C493F1C855}"/>
               </a:ext>
             </a:extLst>
           </p:cNvPr>
@@ -7901,7 +7935,7 @@
           <p:cNvPr id="13" name="">
             <a:extLst xmlns:a="http://schemas.openxmlformats.org/drawingml/2006/main">
               <a:ext uri="{FF2B5EF4-FFF2-40B4-BE49-F238E27FC236}">
-                <a16:creationId xmlns:a16="http://schemas.microsoft.com/office/drawing/2014/main" id="{B3AB4FBD-C860-4DE3-A3FF-796AA8AA8613}"/>
+                <a16:creationId xmlns:a16="http://schemas.microsoft.com/office/drawing/2014/main" id="{7ECDB862-C7FC-4711-A18C-7F850BB89026}"/>
               </a:ext>
             </a:extLst>
           </p:cNvPr>
@@ -7936,7 +7970,7 @@
           <p:cNvPr id="14" name="">
             <a:extLst xmlns:a="http://schemas.openxmlformats.org/drawingml/2006/main">
               <a:ext uri="{FF2B5EF4-FFF2-40B4-BE49-F238E27FC236}">
-                <a16:creationId xmlns:a16="http://schemas.microsoft.com/office/drawing/2014/main" id="{BEF82327-7E1A-42F3-9129-5F205031CD06}"/>
+                <a16:creationId xmlns:a16="http://schemas.microsoft.com/office/drawing/2014/main" id="{1F4C3A24-6FA2-40C7-9C75-EEFB1E135261}"/>
               </a:ext>
             </a:extLst>
           </p:cNvPr>
@@ -7969,7 +8003,7 @@
           <p:cNvPr id="15" name="">
             <a:extLst xmlns:a="http://schemas.openxmlformats.org/drawingml/2006/main">
               <a:ext uri="{FF2B5EF4-FFF2-40B4-BE49-F238E27FC236}">
-                <a16:creationId xmlns:a16="http://schemas.microsoft.com/office/drawing/2014/main" id="{A4330E2F-DD0F-4E58-8A56-150439111732}"/>
+                <a16:creationId xmlns:a16="http://schemas.microsoft.com/office/drawing/2014/main" id="{09278635-7AA4-46C0-A33C-6EC96E845C2B}"/>
               </a:ext>
             </a:extLst>
           </p:cNvPr>
@@ -8029,7 +8063,7 @@
           <p:cNvPr id="16" name="">
             <a:extLst xmlns:a="http://schemas.openxmlformats.org/drawingml/2006/main">
               <a:ext uri="{FF2B5EF4-FFF2-40B4-BE49-F238E27FC236}">
-                <a16:creationId xmlns:a16="http://schemas.microsoft.com/office/drawing/2014/main" id="{D7B0C4B9-7297-4271-8070-3A875137BD74}"/>
+                <a16:creationId xmlns:a16="http://schemas.microsoft.com/office/drawing/2014/main" id="{C67F8095-B792-4CB2-870B-BCCB8B93B45C}"/>
               </a:ext>
             </a:extLst>
           </p:cNvPr>
@@ -8089,23 +8123,23 @@
           <p:cNvPr id="17" name="">
             <a:extLst xmlns:a="http://schemas.openxmlformats.org/drawingml/2006/main">
               <a:ext uri="{FF2B5EF4-FFF2-40B4-BE49-F238E27FC236}">
-                <a16:creationId xmlns:a16="http://schemas.microsoft.com/office/drawing/2014/main" id="{E8C90026-6804-43DA-BB88-E4DC8B7F0CD4}"/>
-              </a:ext>
-            </a:extLst>
-          </p:cNvPr>
-          <p:cNvSpPr>
-            <a:spLocks xmlns:a="http://schemas.openxmlformats.org/drawingml/2006/main" noGrp="1"/>
-          </p:cNvSpPr>
-          <p:nvPr/>
-        </p:nvSpPr>
-        <p:spPr>
-          <a:xfrm xmlns:a="http://schemas.openxmlformats.org/drawingml/2006/main">
-            <a:off x="685800" y="4648200"/>
-            <a:ext cx="5048250" cy="990600"/>
+                <a16:creationId xmlns:a16="http://schemas.microsoft.com/office/drawing/2014/main" id="{9CEEFDC9-45E1-4E45-ABCE-9B004105DC1B}"/>
+              </a:ext>
+            </a:extLst>
+          </p:cNvPr>
+          <p:cNvSpPr>
+            <a:spLocks xmlns:a="http://schemas.openxmlformats.org/drawingml/2006/main" noGrp="1"/>
+          </p:cNvSpPr>
+          <p:nvPr/>
+        </p:nvSpPr>
+        <p:spPr>
+          <a:xfrm xmlns:a="http://schemas.openxmlformats.org/drawingml/2006/main">
+            <a:off x="685800" y="4572000"/>
+            <a:ext cx="5048250" cy="1219200"/>
           </a:xfrm>
           <a:prstGeom xmlns:a="http://schemas.openxmlformats.org/drawingml/2006/main" prst="roundRect">
             <a:avLst>
-              <a:gd name="adj" fmla="val 7692"/>
+              <a:gd name="adj" fmla="val 6250"/>
             </a:avLst>
           </a:prstGeom>
           <a:solidFill xmlns:a="http://schemas.openxmlformats.org/drawingml/2006/main">
@@ -8124,19 +8158,19 @@
           <p:cNvPr id="18" name="">
             <a:extLst xmlns:a="http://schemas.openxmlformats.org/drawingml/2006/main">
               <a:ext uri="{FF2B5EF4-FFF2-40B4-BE49-F238E27FC236}">
-                <a16:creationId xmlns:a16="http://schemas.microsoft.com/office/drawing/2014/main" id="{DC478BE3-D516-4141-B3CE-774A1513473C}"/>
-              </a:ext>
-            </a:extLst>
-          </p:cNvPr>
-          <p:cNvSpPr>
-            <a:spLocks xmlns:a="http://schemas.openxmlformats.org/drawingml/2006/main" noGrp="1"/>
-          </p:cNvSpPr>
-          <p:nvPr/>
-        </p:nvSpPr>
-        <p:spPr>
-          <a:xfrm xmlns:a="http://schemas.openxmlformats.org/drawingml/2006/main">
-            <a:off x="685800" y="4648200"/>
-            <a:ext cx="76200" cy="990600"/>
+                <a16:creationId xmlns:a16="http://schemas.microsoft.com/office/drawing/2014/main" id="{0E13E7F8-99DB-4D0E-B497-46DAF38FE816}"/>
+              </a:ext>
+            </a:extLst>
+          </p:cNvPr>
+          <p:cNvSpPr>
+            <a:spLocks xmlns:a="http://schemas.openxmlformats.org/drawingml/2006/main" noGrp="1"/>
+          </p:cNvSpPr>
+          <p:nvPr/>
+        </p:nvSpPr>
+        <p:spPr>
+          <a:xfrm xmlns:a="http://schemas.openxmlformats.org/drawingml/2006/main">
+            <a:off x="685800" y="4572000"/>
+            <a:ext cx="76200" cy="1219200"/>
           </a:xfrm>
           <a:prstGeom xmlns:a="http://schemas.openxmlformats.org/drawingml/2006/main" prst="rect">
             <a:avLst/>
@@ -8157,18 +8191,18 @@
           <p:cNvPr id="19" name="">
             <a:extLst xmlns:a="http://schemas.openxmlformats.org/drawingml/2006/main">
               <a:ext uri="{FF2B5EF4-FFF2-40B4-BE49-F238E27FC236}">
-                <a16:creationId xmlns:a16="http://schemas.microsoft.com/office/drawing/2014/main" id="{4D9CB13B-E030-4937-99C0-0EEBFCB521B9}"/>
-              </a:ext>
-            </a:extLst>
-          </p:cNvPr>
-          <p:cNvSpPr>
-            <a:spLocks xmlns:a="http://schemas.openxmlformats.org/drawingml/2006/main" noGrp="1"/>
-          </p:cNvSpPr>
-          <p:nvPr/>
-        </p:nvSpPr>
-        <p:spPr>
-          <a:xfrm xmlns:a="http://schemas.openxmlformats.org/drawingml/2006/main">
-            <a:off x="914400" y="4857750"/>
+                <a16:creationId xmlns:a16="http://schemas.microsoft.com/office/drawing/2014/main" id="{6080932A-3033-4180-976A-2FA9B082C6DB}"/>
+              </a:ext>
+            </a:extLst>
+          </p:cNvPr>
+          <p:cNvSpPr>
+            <a:spLocks xmlns:a="http://schemas.openxmlformats.org/drawingml/2006/main" noGrp="1"/>
+          </p:cNvSpPr>
+          <p:nvPr/>
+        </p:nvSpPr>
+        <p:spPr>
+          <a:xfrm xmlns:a="http://schemas.openxmlformats.org/drawingml/2006/main">
+            <a:off x="914400" y="4781550"/>
             <a:ext cx="4591050" cy="285750"/>
           </a:xfrm>
           <a:prstGeom xmlns:a="http://schemas.openxmlformats.org/drawingml/2006/main" prst="rect">
@@ -8217,19 +8251,19 @@
           <p:cNvPr id="20" name="">
             <a:extLst xmlns:a="http://schemas.openxmlformats.org/drawingml/2006/main">
               <a:ext uri="{FF2B5EF4-FFF2-40B4-BE49-F238E27FC236}">
-                <a16:creationId xmlns:a16="http://schemas.microsoft.com/office/drawing/2014/main" id="{9CDB8876-091B-4648-B5D6-19C90DCAB90D}"/>
-              </a:ext>
-            </a:extLst>
-          </p:cNvPr>
-          <p:cNvSpPr>
-            <a:spLocks xmlns:a="http://schemas.openxmlformats.org/drawingml/2006/main" noGrp="1"/>
-          </p:cNvSpPr>
-          <p:nvPr/>
-        </p:nvSpPr>
-        <p:spPr>
-          <a:xfrm xmlns:a="http://schemas.openxmlformats.org/drawingml/2006/main">
-            <a:off x="914400" y="5295900"/>
-            <a:ext cx="4591050" cy="152400"/>
+                <a16:creationId xmlns:a16="http://schemas.microsoft.com/office/drawing/2014/main" id="{F08E2A36-B6F7-4545-86B0-EC4BFE9A9D71}"/>
+              </a:ext>
+            </a:extLst>
+          </p:cNvPr>
+          <p:cNvSpPr>
+            <a:spLocks xmlns:a="http://schemas.openxmlformats.org/drawingml/2006/main" noGrp="1"/>
+          </p:cNvSpPr>
+          <p:nvPr/>
+        </p:nvSpPr>
+        <p:spPr>
+          <a:xfrm xmlns:a="http://schemas.openxmlformats.org/drawingml/2006/main">
+            <a:off x="914400" y="5219700"/>
+            <a:ext cx="4591050" cy="381000"/>
           </a:xfrm>
           <a:prstGeom xmlns:a="http://schemas.openxmlformats.org/drawingml/2006/main" prst="rect">
             <a:avLst/>
@@ -8250,7 +8284,7 @@
         </p:spPr>
         <p:txBody>
           <a:bodyPr xmlns:a="http://schemas.openxmlformats.org/drawingml/2006/main" lIns="0" tIns="0" rIns="0" bIns="0" anchor="t">
-            <a:normAutofit fontScale="90353"/>
+            <a:normAutofit fontScale="100000"/>
           </a:bodyPr>
           <a:lstStyle xmlns:a="http://schemas.openxmlformats.org/drawingml/2006/main"/>
           <a:p xmlns:a="http://schemas.openxmlformats.org/drawingml/2006/main">
@@ -8267,7 +8301,24 @@
                   <a:srgbClr val="0F172A"/>
                 </a:solidFill>
               </a:rPr>
-              <a:t>影響範囲が広いため、実行前のバックアップとデータ型確認が必要。</a:t>
+              <a:t>影響範囲が広いため、実行前のバックアップと</a:t>
+            </a:r>
+          </a:p>
+          <a:p xmlns:a="http://schemas.openxmlformats.org/drawingml/2006/main">
+            <a:pPr algn="l">
+              <a:defRPr sz="1088" b="0">
+                <a:solidFill>
+                  <a:srgbClr val="0F172A"/>
+                </a:solidFill>
+              </a:defRPr>
+            </a:pPr>
+            <a:r>
+              <a:rPr sz="1088" b="0">
+                <a:solidFill>
+                  <a:srgbClr val="0F172A"/>
+                </a:solidFill>
+              </a:rPr>
+              <a:t>データ型確認が必要。</a:t>
             </a:r>
           </a:p>
         </p:txBody>
@@ -8281,7 +8332,7 @@
           <p:nvPr/>
         </p:nvPicPr>
         <p:blipFill>
-          <a:blip xmlns:r="http://schemas.openxmlformats.org/officeDocument/2006/relationships" xmlns:a="http://schemas.openxmlformats.org/drawingml/2006/main" r:embed="Rc52ce56bf99c478e"/>
+          <a:blip xmlns:r="http://schemas.openxmlformats.org/officeDocument/2006/relationships" xmlns:a="http://schemas.openxmlformats.org/drawingml/2006/main" r:embed="R8992b50a6efd4639"/>
           <a:stretch xmlns:a="http://schemas.openxmlformats.org/drawingml/2006/main"/>
         </p:blipFill>
         <p:spPr>
@@ -8303,7 +8354,7 @@
           <p:nvPr/>
         </p:nvPicPr>
         <p:blipFill>
-          <a:blip xmlns:r="http://schemas.openxmlformats.org/officeDocument/2006/relationships" xmlns:a="http://schemas.openxmlformats.org/drawingml/2006/main" r:embed="R29960b42fae44a83"/>
+          <a:blip xmlns:r="http://schemas.openxmlformats.org/officeDocument/2006/relationships" xmlns:a="http://schemas.openxmlformats.org/drawingml/2006/main" r:embed="R3078cefedab3412c"/>
           <a:stretch xmlns:a="http://schemas.openxmlformats.org/drawingml/2006/main"/>
         </p:blipFill>
         <p:spPr>
@@ -8321,7 +8372,7 @@
           <p:cNvPr id="23" name="">
             <a:extLst xmlns:a="http://schemas.openxmlformats.org/drawingml/2006/main">
               <a:ext uri="{FF2B5EF4-FFF2-40B4-BE49-F238E27FC236}">
-                <a16:creationId xmlns:a16="http://schemas.microsoft.com/office/drawing/2014/main" id="{1969A0ED-1DA4-49FC-B932-A707910DAABB}"/>
+                <a16:creationId xmlns:a16="http://schemas.microsoft.com/office/drawing/2014/main" id="{992035C7-E4BD-4AF5-905C-A9E88F5F78E7}"/>
               </a:ext>
             </a:extLst>
           </p:cNvPr>
@@ -8359,14 +8410,14 @@
           <a:lstStyle xmlns:a="http://schemas.openxmlformats.org/drawingml/2006/main"/>
           <a:p xmlns:a="http://schemas.openxmlformats.org/drawingml/2006/main">
             <a:pPr algn="l">
-              <a:defRPr sz="863" b="1">
+              <a:defRPr sz="938" b="1">
                 <a:solidFill>
                   <a:srgbClr val="5B67D8"/>
                 </a:solidFill>
               </a:defRPr>
             </a:pPr>
             <a:r>
-              <a:rPr sz="863" b="1">
+              <a:rPr sz="938" b="1">
                 <a:solidFill>
                   <a:srgbClr val="5B67D8"/>
                 </a:solidFill>
@@ -8381,7 +8432,7 @@
           <p:cNvPr id="24" name="">
             <a:extLst xmlns:a="http://schemas.openxmlformats.org/drawingml/2006/main">
               <a:ext uri="{FF2B5EF4-FFF2-40B4-BE49-F238E27FC236}">
-                <a16:creationId xmlns:a16="http://schemas.microsoft.com/office/drawing/2014/main" id="{8EB7AF9D-6716-4E40-84B6-6DF2AF12E59B}"/>
+                <a16:creationId xmlns:a16="http://schemas.microsoft.com/office/drawing/2014/main" id="{28958A8A-9095-4558-97F4-A31E949EA385}"/>
               </a:ext>
             </a:extLst>
           </p:cNvPr>
@@ -8419,14 +8470,14 @@
           <a:lstStyle xmlns:a="http://schemas.openxmlformats.org/drawingml/2006/main"/>
           <a:p xmlns:a="http://schemas.openxmlformats.org/drawingml/2006/main">
             <a:pPr algn="l">
-              <a:defRPr sz="863" b="1">
+              <a:defRPr sz="938" b="1">
                 <a:solidFill>
                   <a:srgbClr val="2CB1BC"/>
                 </a:solidFill>
               </a:defRPr>
             </a:pPr>
             <a:r>
-              <a:rPr sz="863" b="1">
+              <a:rPr sz="938" b="1">
                 <a:solidFill>
                   <a:srgbClr val="2CB1BC"/>
                 </a:solidFill>
@@ -8441,19 +8492,19 @@
           <p:cNvPr id="25" name="">
             <a:extLst xmlns:a="http://schemas.openxmlformats.org/drawingml/2006/main">
               <a:ext uri="{FF2B5EF4-FFF2-40B4-BE49-F238E27FC236}">
-                <a16:creationId xmlns:a16="http://schemas.microsoft.com/office/drawing/2014/main" id="{94446A68-B127-4426-B8B9-EDB65B422CA0}"/>
-              </a:ext>
-            </a:extLst>
-          </p:cNvPr>
-          <p:cNvSpPr>
-            <a:spLocks xmlns:a="http://schemas.openxmlformats.org/drawingml/2006/main" noGrp="1"/>
-          </p:cNvSpPr>
-          <p:nvPr/>
-        </p:nvSpPr>
-        <p:spPr>
-          <a:xfrm xmlns:a="http://schemas.openxmlformats.org/drawingml/2006/main">
-            <a:off x="514350" y="6400800"/>
-            <a:ext cx="8572500" cy="171450"/>
+                <a16:creationId xmlns:a16="http://schemas.microsoft.com/office/drawing/2014/main" id="{0BE622A3-A0C2-4655-89A5-D7916B1D9855}"/>
+              </a:ext>
+            </a:extLst>
+          </p:cNvPr>
+          <p:cNvSpPr>
+            <a:spLocks xmlns:a="http://schemas.openxmlformats.org/drawingml/2006/main" noGrp="1"/>
+          </p:cNvSpPr>
+          <p:nvPr/>
+        </p:nvSpPr>
+        <p:spPr>
+          <a:xfrm xmlns:a="http://schemas.openxmlformats.org/drawingml/2006/main">
+            <a:off x="514350" y="6381750"/>
+            <a:ext cx="8763000" cy="190500"/>
           </a:xfrm>
           <a:prstGeom xmlns:a="http://schemas.openxmlformats.org/drawingml/2006/main" prst="rect">
             <a:avLst/>
@@ -8479,14 +8530,14 @@
           <a:lstStyle xmlns:a="http://schemas.openxmlformats.org/drawingml/2006/main"/>
           <a:p xmlns:a="http://schemas.openxmlformats.org/drawingml/2006/main">
             <a:pPr algn="l">
-              <a:defRPr sz="713" b="0">
+              <a:defRPr sz="825" b="0">
                 <a:solidFill>
                   <a:srgbClr val="475569"/>
                 </a:solidFill>
               </a:defRPr>
             </a:pPr>
             <a:r>
-              <a:rPr sz="713" b="0">
+              <a:rPr sz="825" b="0">
                 <a:solidFill>
                   <a:srgbClr val="475569"/>
                 </a:solidFill>
@@ -8501,19 +8552,19 @@
           <p:cNvPr id="26" name="">
             <a:extLst xmlns:a="http://schemas.openxmlformats.org/drawingml/2006/main">
               <a:ext uri="{FF2B5EF4-FFF2-40B4-BE49-F238E27FC236}">
-                <a16:creationId xmlns:a16="http://schemas.microsoft.com/office/drawing/2014/main" id="{EF489797-6EA0-426A-98A4-AFCCD5F10A5D}"/>
-              </a:ext>
-            </a:extLst>
-          </p:cNvPr>
-          <p:cNvSpPr>
-            <a:spLocks xmlns:a="http://schemas.openxmlformats.org/drawingml/2006/main" noGrp="1"/>
-          </p:cNvSpPr>
-          <p:nvPr/>
-        </p:nvSpPr>
-        <p:spPr>
-          <a:xfrm xmlns:a="http://schemas.openxmlformats.org/drawingml/2006/main">
-            <a:off x="11049000" y="6400800"/>
-            <a:ext cx="628650" cy="171450"/>
+                <a16:creationId xmlns:a16="http://schemas.microsoft.com/office/drawing/2014/main" id="{A82FC28F-3B67-46DB-BBE3-4CE95060AE52}"/>
+              </a:ext>
+            </a:extLst>
+          </p:cNvPr>
+          <p:cNvSpPr>
+            <a:spLocks xmlns:a="http://schemas.openxmlformats.org/drawingml/2006/main" noGrp="1"/>
+          </p:cNvSpPr>
+          <p:nvPr/>
+        </p:nvSpPr>
+        <p:spPr>
+          <a:xfrm xmlns:a="http://schemas.openxmlformats.org/drawingml/2006/main">
+            <a:off x="11049000" y="6381750"/>
+            <a:ext cx="628650" cy="190500"/>
           </a:xfrm>
           <a:prstGeom xmlns:a="http://schemas.openxmlformats.org/drawingml/2006/main" prst="rect">
             <a:avLst/>
@@ -8539,14 +8590,14 @@
           <a:lstStyle xmlns:a="http://schemas.openxmlformats.org/drawingml/2006/main"/>
           <a:p xmlns:a="http://schemas.openxmlformats.org/drawingml/2006/main">
             <a:pPr algn="r">
-              <a:defRPr sz="750" b="0">
+              <a:defRPr sz="825" b="0">
                 <a:solidFill>
                   <a:srgbClr val="475569"/>
                 </a:solidFill>
               </a:defRPr>
             </a:pPr>
             <a:r>
-              <a:rPr sz="750" b="0">
+              <a:rPr sz="825" b="0">
                 <a:solidFill>
                   <a:srgbClr val="475569"/>
                 </a:solidFill>
@@ -8559,7 +8610,7 @@
     </p:spTree>
     <p:extLst>
       <p:ext uri="{BB962C8B-B14F-4D97-AF65-F5344CB8AC3E}">
-        <p14:creationId xmlns:p14="http://schemas.microsoft.com/office/powerpoint/2010/main" val="698272595"/>
+        <p14:creationId xmlns:p14="http://schemas.microsoft.com/office/powerpoint/2010/main" val="680294880"/>
       </p:ext>
     </p:extLst>
   </p:cSld>
@@ -8590,7 +8641,7 @@
           <p:cNvPr id="1" name="Slide Number Placeholder 5">
             <a:extLst xmlns:a="http://schemas.openxmlformats.org/drawingml/2006/main">
               <a:ext uri="{FF2B5EF4-FFF2-40B4-BE49-F238E27FC236}">
-                <a16:creationId xmlns:a16="http://schemas.microsoft.com/office/drawing/2014/main" id="{07657F96-14BB-4F34-A3C2-E58CAF19D6CA}"/>
+                <a16:creationId xmlns:a16="http://schemas.microsoft.com/office/drawing/2014/main" id="{439AD580-5634-40B8-ADF2-F75BA71FC2A9}"/>
               </a:ext>
             </a:extLst>
           </p:cNvPr>
@@ -8622,7 +8673,7 @@
           <p:cNvPr id="2" name="">
             <a:extLst xmlns:a="http://schemas.openxmlformats.org/drawingml/2006/main">
               <a:ext uri="{FF2B5EF4-FFF2-40B4-BE49-F238E27FC236}">
-                <a16:creationId xmlns:a16="http://schemas.microsoft.com/office/drawing/2014/main" id="{2155F98B-38F0-4ABC-9DE5-1AA663EC1A46}"/>
+                <a16:creationId xmlns:a16="http://schemas.microsoft.com/office/drawing/2014/main" id="{E43B29B2-E58A-40E2-B1C5-3C83159D2059}"/>
               </a:ext>
             </a:extLst>
           </p:cNvPr>
@@ -8655,7 +8706,7 @@
           <p:cNvPr id="3" name="">
             <a:extLst xmlns:a="http://schemas.openxmlformats.org/drawingml/2006/main">
               <a:ext uri="{FF2B5EF4-FFF2-40B4-BE49-F238E27FC236}">
-                <a16:creationId xmlns:a16="http://schemas.microsoft.com/office/drawing/2014/main" id="{B175E18D-A370-43A4-B2B1-FDA5C03CA0B2}"/>
+                <a16:creationId xmlns:a16="http://schemas.microsoft.com/office/drawing/2014/main" id="{C134ADF2-DC84-4E1A-A5A5-55EE4B2E8DC7}"/>
               </a:ext>
             </a:extLst>
           </p:cNvPr>
@@ -8688,7 +8739,7 @@
           <p:cNvPr id="4" name="">
             <a:extLst xmlns:a="http://schemas.openxmlformats.org/drawingml/2006/main">
               <a:ext uri="{FF2B5EF4-FFF2-40B4-BE49-F238E27FC236}">
-                <a16:creationId xmlns:a16="http://schemas.microsoft.com/office/drawing/2014/main" id="{43F6D7A8-102A-4F59-B0C4-12C37999139A}"/>
+                <a16:creationId xmlns:a16="http://schemas.microsoft.com/office/drawing/2014/main" id="{1F20871D-C985-40B7-985A-D03F999064E2}"/>
               </a:ext>
             </a:extLst>
           </p:cNvPr>
@@ -8748,7 +8799,7 @@
           <p:cNvPr id="5" name="">
             <a:extLst xmlns:a="http://schemas.openxmlformats.org/drawingml/2006/main">
               <a:ext uri="{FF2B5EF4-FFF2-40B4-BE49-F238E27FC236}">
-                <a16:creationId xmlns:a16="http://schemas.microsoft.com/office/drawing/2014/main" id="{DCC56A07-1052-4E32-8A8B-5F4C95ACBDA2}"/>
+                <a16:creationId xmlns:a16="http://schemas.microsoft.com/office/drawing/2014/main" id="{A7DFA33D-144F-41E0-81CB-2953E7B63FFA}"/>
               </a:ext>
             </a:extLst>
           </p:cNvPr>
@@ -8808,7 +8859,7 @@
           <p:cNvPr id="6" name="">
             <a:extLst xmlns:a="http://schemas.openxmlformats.org/drawingml/2006/main">
               <a:ext uri="{FF2B5EF4-FFF2-40B4-BE49-F238E27FC236}">
-                <a16:creationId xmlns:a16="http://schemas.microsoft.com/office/drawing/2014/main" id="{4A5F434E-1784-4588-A215-76B47E4F291A}"/>
+                <a16:creationId xmlns:a16="http://schemas.microsoft.com/office/drawing/2014/main" id="{934D5DE5-0BE4-4542-AD0A-6D1287320A2D}"/>
               </a:ext>
             </a:extLst>
           </p:cNvPr>
@@ -8868,7 +8919,7 @@
           <p:cNvPr id="7" name="">
             <a:extLst xmlns:a="http://schemas.openxmlformats.org/drawingml/2006/main">
               <a:ext uri="{FF2B5EF4-FFF2-40B4-BE49-F238E27FC236}">
-                <a16:creationId xmlns:a16="http://schemas.microsoft.com/office/drawing/2014/main" id="{7065506F-6BA6-4145-8ABE-468FA1141E87}"/>
+                <a16:creationId xmlns:a16="http://schemas.microsoft.com/office/drawing/2014/main" id="{9E8E25AB-6F33-4890-AEA1-4769A1BF58AD}"/>
               </a:ext>
             </a:extLst>
           </p:cNvPr>
@@ -8903,7 +8954,7 @@
           <p:cNvPr id="8" name="">
             <a:extLst xmlns:a="http://schemas.openxmlformats.org/drawingml/2006/main">
               <a:ext uri="{FF2B5EF4-FFF2-40B4-BE49-F238E27FC236}">
-                <a16:creationId xmlns:a16="http://schemas.microsoft.com/office/drawing/2014/main" id="{84DDBA4D-E814-441E-8C4F-E0F17CAD7CCA}"/>
+                <a16:creationId xmlns:a16="http://schemas.microsoft.com/office/drawing/2014/main" id="{1D9301D5-3B9C-4DE3-8EC6-39FFB8C81A6B}"/>
               </a:ext>
             </a:extLst>
           </p:cNvPr>
@@ -8936,7 +8987,7 @@
           <p:cNvPr id="9" name="">
             <a:extLst xmlns:a="http://schemas.openxmlformats.org/drawingml/2006/main">
               <a:ext uri="{FF2B5EF4-FFF2-40B4-BE49-F238E27FC236}">
-                <a16:creationId xmlns:a16="http://schemas.microsoft.com/office/drawing/2014/main" id="{5E25131C-2BF5-441F-979E-C712B7B38C9E}"/>
+                <a16:creationId xmlns:a16="http://schemas.microsoft.com/office/drawing/2014/main" id="{54F09C4C-768C-4B34-BEEF-5935ED7AEDA8}"/>
               </a:ext>
             </a:extLst>
           </p:cNvPr>
@@ -8996,7 +9047,7 @@
           <p:cNvPr id="10" name="">
             <a:extLst xmlns:a="http://schemas.openxmlformats.org/drawingml/2006/main">
               <a:ext uri="{FF2B5EF4-FFF2-40B4-BE49-F238E27FC236}">
-                <a16:creationId xmlns:a16="http://schemas.microsoft.com/office/drawing/2014/main" id="{9C425C06-EFC1-448F-9C3B-8DBE239663A2}"/>
+                <a16:creationId xmlns:a16="http://schemas.microsoft.com/office/drawing/2014/main" id="{29D78C93-ACFE-4F24-AB54-C46A7DFD7CE0}"/>
               </a:ext>
             </a:extLst>
           </p:cNvPr>
@@ -9056,7 +9107,7 @@
           <p:cNvPr id="11" name="">
             <a:extLst xmlns:a="http://schemas.openxmlformats.org/drawingml/2006/main">
               <a:ext uri="{FF2B5EF4-FFF2-40B4-BE49-F238E27FC236}">
-                <a16:creationId xmlns:a16="http://schemas.microsoft.com/office/drawing/2014/main" id="{ADDE416D-7D83-423E-AD4D-0BE98450A138}"/>
+                <a16:creationId xmlns:a16="http://schemas.microsoft.com/office/drawing/2014/main" id="{7C577E41-5D71-4484-9B6A-AB0E3880E072}"/>
               </a:ext>
             </a:extLst>
           </p:cNvPr>
@@ -9091,7 +9142,7 @@
           <p:cNvPr id="12" name="">
             <a:extLst xmlns:a="http://schemas.openxmlformats.org/drawingml/2006/main">
               <a:ext uri="{FF2B5EF4-FFF2-40B4-BE49-F238E27FC236}">
-                <a16:creationId xmlns:a16="http://schemas.microsoft.com/office/drawing/2014/main" id="{D7434DE0-CD46-4BB6-BBC4-ABBCE14B8C5B}"/>
+                <a16:creationId xmlns:a16="http://schemas.microsoft.com/office/drawing/2014/main" id="{09728FBC-A8F5-4D70-85A5-F389E67065D2}"/>
               </a:ext>
             </a:extLst>
           </p:cNvPr>
@@ -9124,7 +9175,7 @@
           <p:cNvPr id="13" name="">
             <a:extLst xmlns:a="http://schemas.openxmlformats.org/drawingml/2006/main">
               <a:ext uri="{FF2B5EF4-FFF2-40B4-BE49-F238E27FC236}">
-                <a16:creationId xmlns:a16="http://schemas.microsoft.com/office/drawing/2014/main" id="{DF06DD1E-27D5-49A3-96A3-234C918341DF}"/>
+                <a16:creationId xmlns:a16="http://schemas.microsoft.com/office/drawing/2014/main" id="{D5E56798-C1FC-4491-BF36-876A85F9DC84}"/>
               </a:ext>
             </a:extLst>
           </p:cNvPr>
@@ -9184,7 +9235,7 @@
           <p:cNvPr id="14" name="">
             <a:extLst xmlns:a="http://schemas.openxmlformats.org/drawingml/2006/main">
               <a:ext uri="{FF2B5EF4-FFF2-40B4-BE49-F238E27FC236}">
-                <a16:creationId xmlns:a16="http://schemas.microsoft.com/office/drawing/2014/main" id="{EE189278-F33D-4E21-B200-0BA689EE83ED}"/>
+                <a16:creationId xmlns:a16="http://schemas.microsoft.com/office/drawing/2014/main" id="{3113C0E0-496F-4B75-A4A5-C9180869578C}"/>
               </a:ext>
             </a:extLst>
           </p:cNvPr>
@@ -9244,7 +9295,7 @@
           <p:cNvPr id="15" name="">
             <a:extLst xmlns:a="http://schemas.openxmlformats.org/drawingml/2006/main">
               <a:ext uri="{FF2B5EF4-FFF2-40B4-BE49-F238E27FC236}">
-                <a16:creationId xmlns:a16="http://schemas.microsoft.com/office/drawing/2014/main" id="{FCA95972-6770-465C-8158-26A3CB224DE8}"/>
+                <a16:creationId xmlns:a16="http://schemas.microsoft.com/office/drawing/2014/main" id="{1273DA79-2FE4-489D-AF52-625161D2F4D5}"/>
               </a:ext>
             </a:extLst>
           </p:cNvPr>
@@ -9279,7 +9330,7 @@
           <p:cNvPr id="16" name="">
             <a:extLst xmlns:a="http://schemas.openxmlformats.org/drawingml/2006/main">
               <a:ext uri="{FF2B5EF4-FFF2-40B4-BE49-F238E27FC236}">
-                <a16:creationId xmlns:a16="http://schemas.microsoft.com/office/drawing/2014/main" id="{1577348C-CFDA-470E-9975-B1CB97D00CB0}"/>
+                <a16:creationId xmlns:a16="http://schemas.microsoft.com/office/drawing/2014/main" id="{6747050D-9B65-4BF7-BECA-E4D5D39873A8}"/>
               </a:ext>
             </a:extLst>
           </p:cNvPr>
@@ -9312,7 +9363,7 @@
           <p:cNvPr id="17" name="">
             <a:extLst xmlns:a="http://schemas.openxmlformats.org/drawingml/2006/main">
               <a:ext uri="{FF2B5EF4-FFF2-40B4-BE49-F238E27FC236}">
-                <a16:creationId xmlns:a16="http://schemas.microsoft.com/office/drawing/2014/main" id="{7C84443D-F231-4287-AEEE-EEEB9886402F}"/>
+                <a16:creationId xmlns:a16="http://schemas.microsoft.com/office/drawing/2014/main" id="{297FD336-F7F6-49DE-8D23-FC4A321EAA96}"/>
               </a:ext>
             </a:extLst>
           </p:cNvPr>
@@ -9372,7 +9423,7 @@
           <p:cNvPr id="18" name="">
             <a:extLst xmlns:a="http://schemas.openxmlformats.org/drawingml/2006/main">
               <a:ext uri="{FF2B5EF4-FFF2-40B4-BE49-F238E27FC236}">
-                <a16:creationId xmlns:a16="http://schemas.microsoft.com/office/drawing/2014/main" id="{BA48DACB-3968-4D1E-BBA0-584379D55F59}"/>
+                <a16:creationId xmlns:a16="http://schemas.microsoft.com/office/drawing/2014/main" id="{0B1CE247-C28D-4037-9C5D-B5929FA5911B}"/>
               </a:ext>
             </a:extLst>
           </p:cNvPr>
@@ -9432,7 +9483,7 @@
           <p:cNvPr id="19" name="">
             <a:extLst xmlns:a="http://schemas.openxmlformats.org/drawingml/2006/main">
               <a:ext uri="{FF2B5EF4-FFF2-40B4-BE49-F238E27FC236}">
-                <a16:creationId xmlns:a16="http://schemas.microsoft.com/office/drawing/2014/main" id="{B5503ADB-F556-45F8-8A92-C539D57F2E55}"/>
+                <a16:creationId xmlns:a16="http://schemas.microsoft.com/office/drawing/2014/main" id="{4F07122E-41A6-41A1-B798-1DD2F321305D}"/>
               </a:ext>
             </a:extLst>
           </p:cNvPr>
@@ -9467,7 +9518,7 @@
           <p:cNvPr id="20" name="">
             <a:extLst xmlns:a="http://schemas.openxmlformats.org/drawingml/2006/main">
               <a:ext uri="{FF2B5EF4-FFF2-40B4-BE49-F238E27FC236}">
-                <a16:creationId xmlns:a16="http://schemas.microsoft.com/office/drawing/2014/main" id="{42ECBD07-5D47-463B-815B-EB6A56CE9BA9}"/>
+                <a16:creationId xmlns:a16="http://schemas.microsoft.com/office/drawing/2014/main" id="{78453999-DA49-4011-A781-FE42CCC93137}"/>
               </a:ext>
             </a:extLst>
           </p:cNvPr>
@@ -9527,19 +9578,19 @@
           <p:cNvPr id="21" name="">
             <a:extLst xmlns:a="http://schemas.openxmlformats.org/drawingml/2006/main">
               <a:ext uri="{FF2B5EF4-FFF2-40B4-BE49-F238E27FC236}">
-                <a16:creationId xmlns:a16="http://schemas.microsoft.com/office/drawing/2014/main" id="{3C5AD5B6-753F-43AB-8320-B21799577121}"/>
-              </a:ext>
-            </a:extLst>
-          </p:cNvPr>
-          <p:cNvSpPr>
-            <a:spLocks xmlns:a="http://schemas.openxmlformats.org/drawingml/2006/main" noGrp="1"/>
-          </p:cNvSpPr>
-          <p:nvPr/>
-        </p:nvSpPr>
-        <p:spPr>
-          <a:xfrm xmlns:a="http://schemas.openxmlformats.org/drawingml/2006/main">
-            <a:off x="514350" y="6400800"/>
-            <a:ext cx="8572500" cy="171450"/>
+                <a16:creationId xmlns:a16="http://schemas.microsoft.com/office/drawing/2014/main" id="{7F5980FC-5006-489B-AD2C-58E0E1139DBF}"/>
+              </a:ext>
+            </a:extLst>
+          </p:cNvPr>
+          <p:cNvSpPr>
+            <a:spLocks xmlns:a="http://schemas.openxmlformats.org/drawingml/2006/main" noGrp="1"/>
+          </p:cNvSpPr>
+          <p:nvPr/>
+        </p:nvSpPr>
+        <p:spPr>
+          <a:xfrm xmlns:a="http://schemas.openxmlformats.org/drawingml/2006/main">
+            <a:off x="514350" y="6381750"/>
+            <a:ext cx="8763000" cy="190500"/>
           </a:xfrm>
           <a:prstGeom xmlns:a="http://schemas.openxmlformats.org/drawingml/2006/main" prst="rect">
             <a:avLst/>
@@ -9565,14 +9616,14 @@
           <a:lstStyle xmlns:a="http://schemas.openxmlformats.org/drawingml/2006/main"/>
           <a:p xmlns:a="http://schemas.openxmlformats.org/drawingml/2006/main">
             <a:pPr algn="l">
-              <a:defRPr sz="713" b="0">
+              <a:defRPr sz="825" b="0">
                 <a:solidFill>
                   <a:srgbClr val="475569"/>
                 </a:solidFill>
               </a:defRPr>
             </a:pPr>
             <a:r>
-              <a:rPr sz="713" b="0">
+              <a:rPr sz="825" b="0">
                 <a:solidFill>
                   <a:srgbClr val="475569"/>
                 </a:solidFill>
@@ -9587,19 +9638,19 @@
           <p:cNvPr id="22" name="">
             <a:extLst xmlns:a="http://schemas.openxmlformats.org/drawingml/2006/main">
               <a:ext uri="{FF2B5EF4-FFF2-40B4-BE49-F238E27FC236}">
-                <a16:creationId xmlns:a16="http://schemas.microsoft.com/office/drawing/2014/main" id="{D7BB29C6-AB8A-440B-895D-AFB062ED2CE2}"/>
-              </a:ext>
-            </a:extLst>
-          </p:cNvPr>
-          <p:cNvSpPr>
-            <a:spLocks xmlns:a="http://schemas.openxmlformats.org/drawingml/2006/main" noGrp="1"/>
-          </p:cNvSpPr>
-          <p:nvPr/>
-        </p:nvSpPr>
-        <p:spPr>
-          <a:xfrm xmlns:a="http://schemas.openxmlformats.org/drawingml/2006/main">
-            <a:off x="11049000" y="6400800"/>
-            <a:ext cx="628650" cy="171450"/>
+                <a16:creationId xmlns:a16="http://schemas.microsoft.com/office/drawing/2014/main" id="{B00FCB98-4D70-4A22-B8B2-13AD30EDFC87}"/>
+              </a:ext>
+            </a:extLst>
+          </p:cNvPr>
+          <p:cNvSpPr>
+            <a:spLocks xmlns:a="http://schemas.openxmlformats.org/drawingml/2006/main" noGrp="1"/>
+          </p:cNvSpPr>
+          <p:nvPr/>
+        </p:nvSpPr>
+        <p:spPr>
+          <a:xfrm xmlns:a="http://schemas.openxmlformats.org/drawingml/2006/main">
+            <a:off x="11049000" y="6381750"/>
+            <a:ext cx="628650" cy="190500"/>
           </a:xfrm>
           <a:prstGeom xmlns:a="http://schemas.openxmlformats.org/drawingml/2006/main" prst="rect">
             <a:avLst/>
@@ -9625,14 +9676,14 @@
           <a:lstStyle xmlns:a="http://schemas.openxmlformats.org/drawingml/2006/main"/>
           <a:p xmlns:a="http://schemas.openxmlformats.org/drawingml/2006/main">
             <a:pPr algn="r">
-              <a:defRPr sz="750" b="0">
+              <a:defRPr sz="825" b="0">
                 <a:solidFill>
                   <a:srgbClr val="475569"/>
                 </a:solidFill>
               </a:defRPr>
             </a:pPr>
             <a:r>
-              <a:rPr sz="750" b="0">
+              <a:rPr sz="825" b="0">
                 <a:solidFill>
                   <a:srgbClr val="475569"/>
                 </a:solidFill>
@@ -9645,7 +9696,7 @@
     </p:spTree>
     <p:extLst>
       <p:ext uri="{BB962C8B-B14F-4D97-AF65-F5344CB8AC3E}">
-        <p14:creationId xmlns:p14="http://schemas.microsoft.com/office/powerpoint/2010/main" val="1757790760"/>
+        <p14:creationId xmlns:p14="http://schemas.microsoft.com/office/powerpoint/2010/main" val="659682953"/>
       </p:ext>
     </p:extLst>
   </p:cSld>
